--- a/4/РОП/Практики_1-8/Презентации/РОП_Практическая_4_АлбахтинИВ.pptx
+++ b/4/РОП/Практики_1-8/Презентации/РОП_Практическая_4_АлбахтинИВ.pptx
@@ -2,18 +2,18 @@
 <file path=ppt/presentation.xml><?xml version="1.0" encoding="utf-8"?>
 <p:presentation xmlns:p="http://schemas.openxmlformats.org/presentationml/2006/main">
   <p:sldMasterIdLst>
-    <p:sldMasterId xmlns:r="http://schemas.openxmlformats.org/officeDocument/2006/relationships" id="2147483648" r:id="R6c4be99572ba439f"/>
+    <p:sldMasterId xmlns:r="http://schemas.openxmlformats.org/officeDocument/2006/relationships" id="2147483648" r:id="R95ce2ec0edd44183"/>
   </p:sldMasterIdLst>
   <p:notesMasterIdLst>
-    <p:notesMasterId xmlns:r="http://schemas.openxmlformats.org/officeDocument/2006/relationships" r:id="R9e46cf36a7574cd3"/>
+    <p:notesMasterId xmlns:r="http://schemas.openxmlformats.org/officeDocument/2006/relationships" r:id="R43d05a33ccf940d6"/>
   </p:notesMasterIdLst>
   <p:sldIdLst>
-    <p:sldId xmlns:r="http://schemas.openxmlformats.org/officeDocument/2006/relationships" id="256" r:id="Rfad6b6905ee848fe"/>
-    <p:sldId xmlns:r="http://schemas.openxmlformats.org/officeDocument/2006/relationships" id="257" r:id="Ra35440fb3d63418c"/>
-    <p:sldId xmlns:r="http://schemas.openxmlformats.org/officeDocument/2006/relationships" id="258" r:id="R9cf5776f8b614100"/>
-    <p:sldId xmlns:r="http://schemas.openxmlformats.org/officeDocument/2006/relationships" id="259" r:id="Rf583927922b0494a"/>
-    <p:sldId xmlns:r="http://schemas.openxmlformats.org/officeDocument/2006/relationships" id="260" r:id="R585b12236cd24eb3"/>
-    <p:sldId xmlns:r="http://schemas.openxmlformats.org/officeDocument/2006/relationships" id="261" r:id="Rbd4b63e9b5b346e0"/>
+    <p:sldId xmlns:r="http://schemas.openxmlformats.org/officeDocument/2006/relationships" id="256" r:id="Rf0c37473942b4af5"/>
+    <p:sldId xmlns:r="http://schemas.openxmlformats.org/officeDocument/2006/relationships" id="257" r:id="Rf93501d0336d49bd"/>
+    <p:sldId xmlns:r="http://schemas.openxmlformats.org/officeDocument/2006/relationships" id="258" r:id="R7ebaa0627c814e8a"/>
+    <p:sldId xmlns:r="http://schemas.openxmlformats.org/officeDocument/2006/relationships" id="259" r:id="Ra786da778e214fd7"/>
+    <p:sldId xmlns:r="http://schemas.openxmlformats.org/officeDocument/2006/relationships" id="260" r:id="R88436ea78ce144ca"/>
+    <p:sldId xmlns:r="http://schemas.openxmlformats.org/officeDocument/2006/relationships" id="261" r:id="R0d8423e782124619"/>
   </p:sldIdLst>
   <p:sldSz cx="12192000" cy="6858000"/>
   <p:notesSz cx="6858000" cy="9144000"/>
@@ -895,7 +895,7 @@
   </p:cSld>
   <p:clrMap bg1="lt1" tx1="dk1" bg2="lt2" tx2="dk2" accent1="accent1" accent2="accent2" accent3="accent3" accent4="accent4" accent5="accent5" accent6="accent6" hlink="hlink" folHlink="folHlink"/>
   <p:sldLayoutIdLst>
-    <p:sldLayoutId xmlns:r="http://schemas.openxmlformats.org/officeDocument/2006/relationships" id="2147483649" r:id="R5a581d613421437e"/>
+    <p:sldLayoutId xmlns:r="http://schemas.openxmlformats.org/officeDocument/2006/relationships" id="2147483649" r:id="Rfec161eed73a4ec5"/>
   </p:sldLayoutIdLst>
   <p:txStyles>
     <p:titleStyle>
@@ -1446,7 +1446,7 @@
           <p:cNvPr id="5" name="">
             <a:extLst xmlns:a="http://schemas.openxmlformats.org/drawingml/2006/main">
               <a:ext uri="{FF2B5EF4-FFF2-40B4-BE49-F238E27FC236}">
-                <a16:creationId xmlns:a16="http://schemas.microsoft.com/office/drawing/2014/main" id="{FC56B92D-2A8F-460F-A7A4-EBD63E1842DE}"/>
+                <a16:creationId xmlns:a16="http://schemas.microsoft.com/office/drawing/2014/main" id="{86536F14-E535-4D2E-9F67-62F40F12A9DE}"/>
               </a:ext>
             </a:extLst>
           </p:cNvPr>
@@ -1457,8 +1457,8 @@
         </p:nvSpPr>
         <p:spPr>
           <a:xfrm xmlns:a="http://schemas.openxmlformats.org/drawingml/2006/main">
-            <a:off x="552450" y="333375"/>
-            <a:ext cx="11049000" cy="857250"/>
+            <a:off x="552450" y="266700"/>
+            <a:ext cx="11049000" cy="742950"/>
           </a:xfrm>
           <a:prstGeom xmlns:a="http://schemas.openxmlformats.org/drawingml/2006/main" prst="rect">
             <a:avLst/>
@@ -1469,13 +1469,13 @@
           </a:ln>
         </p:spPr>
         <p:txBody>
-          <a:bodyPr xmlns:a="http://schemas.openxmlformats.org/drawingml/2006/main">
+          <a:bodyPr xmlns:a="http://schemas.openxmlformats.org/drawingml/2006/main" anchor="ctr">
             <a:noAutofit/>
           </a:bodyPr>
           <a:lstStyle xmlns:a="http://schemas.openxmlformats.org/drawingml/2006/main"/>
           <a:p xmlns:a="http://schemas.openxmlformats.org/drawingml/2006/main">
-            <a:pPr>
-              <a:defRPr sz="3150" b="1">
+            <a:pPr algn="l">
+              <a:defRPr sz="2700" b="1">
                 <a:solidFill>
                   <a:srgbClr val="161616"/>
                 </a:solidFill>
@@ -1485,7 +1485,7 @@
               </a:defRPr>
             </a:pPr>
             <a:r>
-              <a:rPr sz="3150" b="1">
+              <a:rPr sz="2700" b="1">
                 <a:solidFill>
                   <a:srgbClr val="161616"/>
                 </a:solidFill>
@@ -1503,7 +1503,7 @@
           <p:cNvPr id="2" name="">
             <a:extLst xmlns:a="http://schemas.openxmlformats.org/drawingml/2006/main">
               <a:ext uri="{FF2B5EF4-FFF2-40B4-BE49-F238E27FC236}">
-                <a16:creationId xmlns:a16="http://schemas.microsoft.com/office/drawing/2014/main" id="{8208890A-7B05-4CFE-B103-5C2EE730C6AC}"/>
+                <a16:creationId xmlns:a16="http://schemas.microsoft.com/office/drawing/2014/main" id="{56D59CAB-8E71-4324-8957-EB5BF632A4F5}"/>
               </a:ext>
             </a:extLst>
           </p:cNvPr>
@@ -1560,7 +1560,7 @@
           <p:cNvPr id="3" name="">
             <a:extLst xmlns:a="http://schemas.openxmlformats.org/drawingml/2006/main">
               <a:ext uri="{FF2B5EF4-FFF2-40B4-BE49-F238E27FC236}">
-                <a16:creationId xmlns:a16="http://schemas.microsoft.com/office/drawing/2014/main" id="{B34526BB-FDDF-4BC7-B70D-57E3A47DB8F1}"/>
+                <a16:creationId xmlns:a16="http://schemas.microsoft.com/office/drawing/2014/main" id="{CF007E15-CD4D-40FF-9846-BF9AB4A7DDCC}"/>
               </a:ext>
             </a:extLst>
           </p:cNvPr>
@@ -1617,7 +1617,7 @@
           <p:cNvPr id="4" name="">
             <a:extLst xmlns:a="http://schemas.openxmlformats.org/drawingml/2006/main">
               <a:ext uri="{FF2B5EF4-FFF2-40B4-BE49-F238E27FC236}">
-                <a16:creationId xmlns:a16="http://schemas.microsoft.com/office/drawing/2014/main" id="{301C992B-5E32-4062-BC90-D53FBB9DBC18}"/>
+                <a16:creationId xmlns:a16="http://schemas.microsoft.com/office/drawing/2014/main" id="{25443574-CE15-45C5-A8DE-29AE593E5BA9}"/>
               </a:ext>
             </a:extLst>
           </p:cNvPr>
@@ -1695,7 +1695,7 @@
     </p:spTree>
     <p:extLst>
       <p:ext uri="{BB962C8B-B14F-4D97-AF65-F5344CB8AC3E}">
-        <p14:creationId xmlns:p14="http://schemas.microsoft.com/office/powerpoint/2010/main" val="31063655"/>
+        <p14:creationId xmlns:p14="http://schemas.microsoft.com/office/powerpoint/2010/main" val="1128499954"/>
       </p:ext>
     </p:extLst>
   </p:cSld>
@@ -1726,7 +1726,7 @@
           <p:cNvPr id="3" name="">
             <a:extLst xmlns:a="http://schemas.openxmlformats.org/drawingml/2006/main">
               <a:ext uri="{FF2B5EF4-FFF2-40B4-BE49-F238E27FC236}">
-                <a16:creationId xmlns:a16="http://schemas.microsoft.com/office/drawing/2014/main" id="{AB4F682F-FF18-432D-8CCC-4E705FE685F2}"/>
+                <a16:creationId xmlns:a16="http://schemas.microsoft.com/office/drawing/2014/main" id="{B3A1C9C9-6F92-45CB-959E-7057E18A0F13}"/>
               </a:ext>
             </a:extLst>
           </p:cNvPr>
@@ -1737,8 +1737,8 @@
         </p:nvSpPr>
         <p:spPr>
           <a:xfrm xmlns:a="http://schemas.openxmlformats.org/drawingml/2006/main">
-            <a:off x="552450" y="333375"/>
-            <a:ext cx="11049000" cy="857250"/>
+            <a:off x="552450" y="266700"/>
+            <a:ext cx="11049000" cy="742950"/>
           </a:xfrm>
           <a:prstGeom xmlns:a="http://schemas.openxmlformats.org/drawingml/2006/main" prst="rect">
             <a:avLst/>
@@ -1749,13 +1749,13 @@
           </a:ln>
         </p:spPr>
         <p:txBody>
-          <a:bodyPr xmlns:a="http://schemas.openxmlformats.org/drawingml/2006/main">
+          <a:bodyPr xmlns:a="http://schemas.openxmlformats.org/drawingml/2006/main" anchor="ctr">
             <a:noAutofit/>
           </a:bodyPr>
           <a:lstStyle xmlns:a="http://schemas.openxmlformats.org/drawingml/2006/main"/>
           <a:p xmlns:a="http://schemas.openxmlformats.org/drawingml/2006/main">
-            <a:pPr>
-              <a:defRPr sz="3150" b="1">
+            <a:pPr algn="l">
+              <a:defRPr sz="2700" b="1">
                 <a:solidFill>
                   <a:srgbClr val="161616"/>
                 </a:solidFill>
@@ -1765,7 +1765,7 @@
               </a:defRPr>
             </a:pPr>
             <a:r>
-              <a:rPr sz="3150" b="1">
+              <a:rPr sz="2700" b="1">
                 <a:solidFill>
                   <a:srgbClr val="161616"/>
                 </a:solidFill>
@@ -1773,7 +1773,7 @@
                 <a:ea typeface="Arial"/>
                 <a:cs typeface="Arial"/>
               </a:rPr>
-              <a:t>Редактор версии BOM</a:t>
+              <a:t>Редактор версии модельного ряда</a:t>
             </a:r>
           </a:p>
         </p:txBody>
@@ -1787,13 +1787,13 @@
           <p:nvPr/>
         </p:nvPicPr>
         <p:blipFill>
-          <a:blip xmlns:r="http://schemas.openxmlformats.org/officeDocument/2006/relationships" xmlns:a="http://schemas.openxmlformats.org/drawingml/2006/main" r:embed="Ra32eb44ba672478d"/>
+          <a:blip xmlns:r="http://schemas.openxmlformats.org/officeDocument/2006/relationships" xmlns:a="http://schemas.openxmlformats.org/drawingml/2006/main" r:embed="R1c38e210962a4a59"/>
           <a:stretch xmlns:a="http://schemas.openxmlformats.org/drawingml/2006/main"/>
         </p:blipFill>
         <p:spPr>
           <a:xfrm xmlns:a="http://schemas.openxmlformats.org/drawingml/2006/main">
-            <a:off x="2095500" y="1285875"/>
-            <a:ext cx="8001000" cy="5000625"/>
+            <a:off x="2726785" y="1285875"/>
+            <a:ext cx="6738431" cy="5000625"/>
           </a:xfrm>
           <a:prstGeom xmlns:a="http://schemas.openxmlformats.org/drawingml/2006/main" prst="rect">
             <a:avLst/>
@@ -1803,7 +1803,7 @@
     </p:spTree>
     <p:extLst>
       <p:ext uri="{BB962C8B-B14F-4D97-AF65-F5344CB8AC3E}">
-        <p14:creationId xmlns:p14="http://schemas.microsoft.com/office/powerpoint/2010/main" val="1995817113"/>
+        <p14:creationId xmlns:p14="http://schemas.microsoft.com/office/powerpoint/2010/main" val="609433388"/>
       </p:ext>
     </p:extLst>
   </p:cSld>
@@ -1834,7 +1834,7 @@
           <p:cNvPr id="3" name="">
             <a:extLst xmlns:a="http://schemas.openxmlformats.org/drawingml/2006/main">
               <a:ext uri="{FF2B5EF4-FFF2-40B4-BE49-F238E27FC236}">
-                <a16:creationId xmlns:a16="http://schemas.microsoft.com/office/drawing/2014/main" id="{378B16F4-5B28-4F8D-95B7-C11284F90F3E}"/>
+                <a16:creationId xmlns:a16="http://schemas.microsoft.com/office/drawing/2014/main" id="{1ACBDB66-D8FD-4E1B-A14B-B38219EFFB2E}"/>
               </a:ext>
             </a:extLst>
           </p:cNvPr>
@@ -1845,8 +1845,8 @@
         </p:nvSpPr>
         <p:spPr>
           <a:xfrm xmlns:a="http://schemas.openxmlformats.org/drawingml/2006/main">
-            <a:off x="552450" y="333375"/>
-            <a:ext cx="11049000" cy="857250"/>
+            <a:off x="552450" y="266700"/>
+            <a:ext cx="11049000" cy="742950"/>
           </a:xfrm>
           <a:prstGeom xmlns:a="http://schemas.openxmlformats.org/drawingml/2006/main" prst="rect">
             <a:avLst/>
@@ -1857,13 +1857,13 @@
           </a:ln>
         </p:spPr>
         <p:txBody>
-          <a:bodyPr xmlns:a="http://schemas.openxmlformats.org/drawingml/2006/main">
+          <a:bodyPr xmlns:a="http://schemas.openxmlformats.org/drawingml/2006/main" anchor="ctr">
             <a:noAutofit/>
           </a:bodyPr>
           <a:lstStyle xmlns:a="http://schemas.openxmlformats.org/drawingml/2006/main"/>
           <a:p xmlns:a="http://schemas.openxmlformats.org/drawingml/2006/main">
-            <a:pPr>
-              <a:defRPr sz="3150" b="1">
+            <a:pPr algn="l">
+              <a:defRPr sz="2700" b="1">
                 <a:solidFill>
                   <a:srgbClr val="161616"/>
                 </a:solidFill>
@@ -1873,7 +1873,7 @@
               </a:defRPr>
             </a:pPr>
             <a:r>
-              <a:rPr sz="3150" b="1">
+              <a:rPr sz="2700" b="1">
                 <a:solidFill>
                   <a:srgbClr val="161616"/>
                 </a:solidFill>
@@ -1895,13 +1895,13 @@
           <p:nvPr/>
         </p:nvPicPr>
         <p:blipFill>
-          <a:blip xmlns:r="http://schemas.openxmlformats.org/officeDocument/2006/relationships" xmlns:a="http://schemas.openxmlformats.org/drawingml/2006/main" r:embed="R3129d3120f1d4211"/>
+          <a:blip xmlns:r="http://schemas.openxmlformats.org/officeDocument/2006/relationships" xmlns:a="http://schemas.openxmlformats.org/drawingml/2006/main" r:embed="R134a8cd279134587"/>
           <a:stretch xmlns:a="http://schemas.openxmlformats.org/drawingml/2006/main"/>
         </p:blipFill>
         <p:spPr>
           <a:xfrm xmlns:a="http://schemas.openxmlformats.org/drawingml/2006/main">
-            <a:off x="2095500" y="1285875"/>
-            <a:ext cx="8001000" cy="5000625"/>
+            <a:off x="2726785" y="1285875"/>
+            <a:ext cx="6738431" cy="5000625"/>
           </a:xfrm>
           <a:prstGeom xmlns:a="http://schemas.openxmlformats.org/drawingml/2006/main" prst="rect">
             <a:avLst/>
@@ -1911,7 +1911,7 @@
     </p:spTree>
     <p:extLst>
       <p:ext uri="{BB962C8B-B14F-4D97-AF65-F5344CB8AC3E}">
-        <p14:creationId xmlns:p14="http://schemas.microsoft.com/office/powerpoint/2010/main" val="791383983"/>
+        <p14:creationId xmlns:p14="http://schemas.microsoft.com/office/powerpoint/2010/main" val="2112987444"/>
       </p:ext>
     </p:extLst>
   </p:cSld>
@@ -1942,7 +1942,7 @@
           <p:cNvPr id="3" name="">
             <a:extLst xmlns:a="http://schemas.openxmlformats.org/drawingml/2006/main">
               <a:ext uri="{FF2B5EF4-FFF2-40B4-BE49-F238E27FC236}">
-                <a16:creationId xmlns:a16="http://schemas.microsoft.com/office/drawing/2014/main" id="{A588B727-84DA-4AD1-9B25-468359C882C7}"/>
+                <a16:creationId xmlns:a16="http://schemas.microsoft.com/office/drawing/2014/main" id="{6D096BCB-E359-4884-AD9F-64AAAB65669C}"/>
               </a:ext>
             </a:extLst>
           </p:cNvPr>
@@ -1953,8 +1953,8 @@
         </p:nvSpPr>
         <p:spPr>
           <a:xfrm xmlns:a="http://schemas.openxmlformats.org/drawingml/2006/main">
-            <a:off x="552450" y="333375"/>
-            <a:ext cx="11049000" cy="857250"/>
+            <a:off x="552450" y="266700"/>
+            <a:ext cx="11049000" cy="742950"/>
           </a:xfrm>
           <a:prstGeom xmlns:a="http://schemas.openxmlformats.org/drawingml/2006/main" prst="rect">
             <a:avLst/>
@@ -1965,13 +1965,13 @@
           </a:ln>
         </p:spPr>
         <p:txBody>
-          <a:bodyPr xmlns:a="http://schemas.openxmlformats.org/drawingml/2006/main">
+          <a:bodyPr xmlns:a="http://schemas.openxmlformats.org/drawingml/2006/main" anchor="ctr">
             <a:noAutofit/>
           </a:bodyPr>
           <a:lstStyle xmlns:a="http://schemas.openxmlformats.org/drawingml/2006/main"/>
           <a:p xmlns:a="http://schemas.openxmlformats.org/drawingml/2006/main">
-            <a:pPr>
-              <a:defRPr sz="3150" b="1">
+            <a:pPr algn="l">
+              <a:defRPr sz="2700" b="1">
                 <a:solidFill>
                   <a:srgbClr val="161616"/>
                 </a:solidFill>
@@ -1981,7 +1981,7 @@
               </a:defRPr>
             </a:pPr>
             <a:r>
-              <a:rPr sz="3150" b="1">
+              <a:rPr sz="2700" b="1">
                 <a:solidFill>
                   <a:srgbClr val="161616"/>
                 </a:solidFill>
@@ -2003,13 +2003,13 @@
           <p:nvPr/>
         </p:nvPicPr>
         <p:blipFill>
-          <a:blip xmlns:r="http://schemas.openxmlformats.org/officeDocument/2006/relationships" xmlns:a="http://schemas.openxmlformats.org/drawingml/2006/main" r:embed="R18309f4344204fea"/>
+          <a:blip xmlns:r="http://schemas.openxmlformats.org/officeDocument/2006/relationships" xmlns:a="http://schemas.openxmlformats.org/drawingml/2006/main" r:embed="R239350d2a9174fe3"/>
           <a:stretch xmlns:a="http://schemas.openxmlformats.org/drawingml/2006/main"/>
         </p:blipFill>
         <p:spPr>
           <a:xfrm xmlns:a="http://schemas.openxmlformats.org/drawingml/2006/main">
-            <a:off x="2095500" y="1285875"/>
-            <a:ext cx="8001000" cy="5000625"/>
+            <a:off x="2726785" y="1285875"/>
+            <a:ext cx="6738431" cy="5000625"/>
           </a:xfrm>
           <a:prstGeom xmlns:a="http://schemas.openxmlformats.org/drawingml/2006/main" prst="rect">
             <a:avLst/>
@@ -2019,7 +2019,7 @@
     </p:spTree>
     <p:extLst>
       <p:ext uri="{BB962C8B-B14F-4D97-AF65-F5344CB8AC3E}">
-        <p14:creationId xmlns:p14="http://schemas.microsoft.com/office/powerpoint/2010/main" val="1270142500"/>
+        <p14:creationId xmlns:p14="http://schemas.microsoft.com/office/powerpoint/2010/main" val="1643715439"/>
       </p:ext>
     </p:extLst>
   </p:cSld>
@@ -2050,7 +2050,7 @@
           <p:cNvPr id="10" name="">
             <a:extLst xmlns:a="http://schemas.openxmlformats.org/drawingml/2006/main">
               <a:ext uri="{FF2B5EF4-FFF2-40B4-BE49-F238E27FC236}">
-                <a16:creationId xmlns:a16="http://schemas.microsoft.com/office/drawing/2014/main" id="{22740924-3208-42BF-AA94-9AB87D8727DF}"/>
+                <a16:creationId xmlns:a16="http://schemas.microsoft.com/office/drawing/2014/main" id="{6E159DE4-AF0B-4F6D-8696-D3BD3847FD47}"/>
               </a:ext>
             </a:extLst>
           </p:cNvPr>
@@ -2061,8 +2061,8 @@
         </p:nvSpPr>
         <p:spPr>
           <a:xfrm xmlns:a="http://schemas.openxmlformats.org/drawingml/2006/main">
-            <a:off x="552450" y="333375"/>
-            <a:ext cx="11049000" cy="857250"/>
+            <a:off x="552450" y="266700"/>
+            <a:ext cx="11049000" cy="742950"/>
           </a:xfrm>
           <a:prstGeom xmlns:a="http://schemas.openxmlformats.org/drawingml/2006/main" prst="rect">
             <a:avLst/>
@@ -2073,13 +2073,13 @@
           </a:ln>
         </p:spPr>
         <p:txBody>
-          <a:bodyPr xmlns:a="http://schemas.openxmlformats.org/drawingml/2006/main">
+          <a:bodyPr xmlns:a="http://schemas.openxmlformats.org/drawingml/2006/main" anchor="ctr">
             <a:noAutofit/>
           </a:bodyPr>
           <a:lstStyle xmlns:a="http://schemas.openxmlformats.org/drawingml/2006/main"/>
           <a:p xmlns:a="http://schemas.openxmlformats.org/drawingml/2006/main">
-            <a:pPr>
-              <a:defRPr sz="3150" b="1">
+            <a:pPr algn="l">
+              <a:defRPr sz="2700" b="1">
                 <a:solidFill>
                   <a:srgbClr val="161616"/>
                 </a:solidFill>
@@ -2089,7 +2089,7 @@
               </a:defRPr>
             </a:pPr>
             <a:r>
-              <a:rPr sz="3150" b="1">
+              <a:rPr sz="2700" b="1">
                 <a:solidFill>
                   <a:srgbClr val="161616"/>
                 </a:solidFill>
@@ -2107,7 +2107,7 @@
           <p:cNvPr id="2" name="">
             <a:extLst xmlns:a="http://schemas.openxmlformats.org/drawingml/2006/main">
               <a:ext uri="{FF2B5EF4-FFF2-40B4-BE49-F238E27FC236}">
-                <a16:creationId xmlns:a16="http://schemas.microsoft.com/office/drawing/2014/main" id="{8E44DB01-2552-4C88-AD88-A9A56C797628}"/>
+                <a16:creationId xmlns:a16="http://schemas.microsoft.com/office/drawing/2014/main" id="{DF2EB3F3-40E2-419D-BD83-D571E4C1EDDB}"/>
               </a:ext>
             </a:extLst>
           </p:cNvPr>
@@ -2191,7 +2191,7 @@
           <p:cNvPr id="3" name="">
             <a:extLst xmlns:a="http://schemas.openxmlformats.org/drawingml/2006/main">
               <a:ext uri="{FF2B5EF4-FFF2-40B4-BE49-F238E27FC236}">
-                <a16:creationId xmlns:a16="http://schemas.microsoft.com/office/drawing/2014/main" id="{9EB55082-549E-4C78-84DA-75F810283287}"/>
+                <a16:creationId xmlns:a16="http://schemas.microsoft.com/office/drawing/2014/main" id="{6F04E048-36E2-4059-A666-08BC382F3C52}"/>
               </a:ext>
             </a:extLst>
           </p:cNvPr>
@@ -2221,7 +2221,7 @@
           <p:cNvPr id="4" name="">
             <a:extLst xmlns:a="http://schemas.openxmlformats.org/drawingml/2006/main">
               <a:ext uri="{FF2B5EF4-FFF2-40B4-BE49-F238E27FC236}">
-                <a16:creationId xmlns:a16="http://schemas.microsoft.com/office/drawing/2014/main" id="{5C2B150F-A56F-4223-BC4E-1EE4AF9D0EEF}"/>
+                <a16:creationId xmlns:a16="http://schemas.microsoft.com/office/drawing/2014/main" id="{7829B3B9-DDC5-4A23-BCF0-DAF8036669C8}"/>
               </a:ext>
             </a:extLst>
           </p:cNvPr>
@@ -2305,7 +2305,7 @@
           <p:cNvPr id="5" name="">
             <a:extLst xmlns:a="http://schemas.openxmlformats.org/drawingml/2006/main">
               <a:ext uri="{FF2B5EF4-FFF2-40B4-BE49-F238E27FC236}">
-                <a16:creationId xmlns:a16="http://schemas.microsoft.com/office/drawing/2014/main" id="{60E17000-AFE6-4B39-A609-62B3DF83FD9C}"/>
+                <a16:creationId xmlns:a16="http://schemas.microsoft.com/office/drawing/2014/main" id="{550120C7-DC95-4A5D-8290-99BD8F2B5791}"/>
               </a:ext>
             </a:extLst>
           </p:cNvPr>
@@ -2335,7 +2335,7 @@
           <p:cNvPr id="6" name="">
             <a:extLst xmlns:a="http://schemas.openxmlformats.org/drawingml/2006/main">
               <a:ext uri="{FF2B5EF4-FFF2-40B4-BE49-F238E27FC236}">
-                <a16:creationId xmlns:a16="http://schemas.microsoft.com/office/drawing/2014/main" id="{F1B6ABA1-C14C-46C1-9ED2-07F36D0F2362}"/>
+                <a16:creationId xmlns:a16="http://schemas.microsoft.com/office/drawing/2014/main" id="{392D2A88-F84A-49E8-926C-5E47B821EE19}"/>
               </a:ext>
             </a:extLst>
           </p:cNvPr>
@@ -2419,7 +2419,7 @@
           <p:cNvPr id="7" name="">
             <a:extLst xmlns:a="http://schemas.openxmlformats.org/drawingml/2006/main">
               <a:ext uri="{FF2B5EF4-FFF2-40B4-BE49-F238E27FC236}">
-                <a16:creationId xmlns:a16="http://schemas.microsoft.com/office/drawing/2014/main" id="{5D870694-9AFD-48D0-98E1-D8CC0B7E3EB6}"/>
+                <a16:creationId xmlns:a16="http://schemas.microsoft.com/office/drawing/2014/main" id="{57BFB5FA-FE6B-4B18-81A2-B28BABFC392B}"/>
               </a:ext>
             </a:extLst>
           </p:cNvPr>
@@ -2449,7 +2449,7 @@
           <p:cNvPr id="8" name="">
             <a:extLst xmlns:a="http://schemas.openxmlformats.org/drawingml/2006/main">
               <a:ext uri="{FF2B5EF4-FFF2-40B4-BE49-F238E27FC236}">
-                <a16:creationId xmlns:a16="http://schemas.microsoft.com/office/drawing/2014/main" id="{1F550E2A-D068-4B9F-B982-9EEBC076F6BA}"/>
+                <a16:creationId xmlns:a16="http://schemas.microsoft.com/office/drawing/2014/main" id="{E6E3D3EB-4B75-4FDA-94CB-EFA782C66C60}"/>
               </a:ext>
             </a:extLst>
           </p:cNvPr>
@@ -2533,7 +2533,7 @@
           <p:cNvPr id="9" name="">
             <a:extLst xmlns:a="http://schemas.openxmlformats.org/drawingml/2006/main">
               <a:ext uri="{FF2B5EF4-FFF2-40B4-BE49-F238E27FC236}">
-                <a16:creationId xmlns:a16="http://schemas.microsoft.com/office/drawing/2014/main" id="{66BB5A0D-A548-4F50-88A0-8EB4B3270DDE}"/>
+                <a16:creationId xmlns:a16="http://schemas.microsoft.com/office/drawing/2014/main" id="{6F5E3A75-F792-479B-BBC4-3DBC7F2AC321}"/>
               </a:ext>
             </a:extLst>
           </p:cNvPr>
@@ -2588,7 +2588,7 @@
     </p:spTree>
     <p:extLst>
       <p:ext uri="{BB962C8B-B14F-4D97-AF65-F5344CB8AC3E}">
-        <p14:creationId xmlns:p14="http://schemas.microsoft.com/office/powerpoint/2010/main" val="1141709888"/>
+        <p14:creationId xmlns:p14="http://schemas.microsoft.com/office/powerpoint/2010/main" val="1258581933"/>
       </p:ext>
     </p:extLst>
   </p:cSld>
@@ -2619,7 +2619,7 @@
           <p:cNvPr id="6" name="">
             <a:extLst xmlns:a="http://schemas.openxmlformats.org/drawingml/2006/main">
               <a:ext uri="{FF2B5EF4-FFF2-40B4-BE49-F238E27FC236}">
-                <a16:creationId xmlns:a16="http://schemas.microsoft.com/office/drawing/2014/main" id="{086CAE57-6558-40AD-84F0-B103ACF0E949}"/>
+                <a16:creationId xmlns:a16="http://schemas.microsoft.com/office/drawing/2014/main" id="{CDC4A760-CD4C-4C13-A0D7-43FEA3A92203}"/>
               </a:ext>
             </a:extLst>
           </p:cNvPr>
@@ -2630,8 +2630,8 @@
         </p:nvSpPr>
         <p:spPr>
           <a:xfrm xmlns:a="http://schemas.openxmlformats.org/drawingml/2006/main">
-            <a:off x="552450" y="333375"/>
-            <a:ext cx="11049000" cy="857250"/>
+            <a:off x="552450" y="266700"/>
+            <a:ext cx="11049000" cy="742950"/>
           </a:xfrm>
           <a:prstGeom xmlns:a="http://schemas.openxmlformats.org/drawingml/2006/main" prst="rect">
             <a:avLst/>
@@ -2642,13 +2642,13 @@
           </a:ln>
         </p:spPr>
         <p:txBody>
-          <a:bodyPr xmlns:a="http://schemas.openxmlformats.org/drawingml/2006/main">
+          <a:bodyPr xmlns:a="http://schemas.openxmlformats.org/drawingml/2006/main" anchor="ctr">
             <a:noAutofit/>
           </a:bodyPr>
           <a:lstStyle xmlns:a="http://schemas.openxmlformats.org/drawingml/2006/main"/>
           <a:p xmlns:a="http://schemas.openxmlformats.org/drawingml/2006/main">
-            <a:pPr>
-              <a:defRPr sz="3150" b="1">
+            <a:pPr algn="l">
+              <a:defRPr sz="2700" b="1">
                 <a:solidFill>
                   <a:srgbClr val="161616"/>
                 </a:solidFill>
@@ -2658,7 +2658,7 @@
               </a:defRPr>
             </a:pPr>
             <a:r>
-              <a:rPr sz="3150" b="1">
+              <a:rPr sz="2700" b="1">
                 <a:solidFill>
                   <a:srgbClr val="161616"/>
                 </a:solidFill>
@@ -2676,7 +2676,7 @@
           <p:cNvPr id="2" name="">
             <a:extLst xmlns:a="http://schemas.openxmlformats.org/drawingml/2006/main">
               <a:ext uri="{FF2B5EF4-FFF2-40B4-BE49-F238E27FC236}">
-                <a16:creationId xmlns:a16="http://schemas.microsoft.com/office/drawing/2014/main" id="{AD57059E-F330-4878-8998-F8D2A9385F41}"/>
+                <a16:creationId xmlns:a16="http://schemas.microsoft.com/office/drawing/2014/main" id="{C0447D64-C337-4EFE-AB7C-9F67140A33F4}"/>
               </a:ext>
             </a:extLst>
           </p:cNvPr>
@@ -2733,7 +2733,7 @@
           <p:cNvPr id="3" name="">
             <a:extLst xmlns:a="http://schemas.openxmlformats.org/drawingml/2006/main">
               <a:ext uri="{FF2B5EF4-FFF2-40B4-BE49-F238E27FC236}">
-                <a16:creationId xmlns:a16="http://schemas.microsoft.com/office/drawing/2014/main" id="{1D00B8CB-E518-42E6-882B-59E3764C3B06}"/>
+                <a16:creationId xmlns:a16="http://schemas.microsoft.com/office/drawing/2014/main" id="{5DC64EA2-7706-4661-A9CD-8EBD222650B0}"/>
               </a:ext>
             </a:extLst>
           </p:cNvPr>
@@ -2790,7 +2790,7 @@
           <p:cNvPr id="4" name="">
             <a:extLst xmlns:a="http://schemas.openxmlformats.org/drawingml/2006/main">
               <a:ext uri="{FF2B5EF4-FFF2-40B4-BE49-F238E27FC236}">
-                <a16:creationId xmlns:a16="http://schemas.microsoft.com/office/drawing/2014/main" id="{2E63C345-C017-4EF2-BFBD-8D8DF809C6AF}"/>
+                <a16:creationId xmlns:a16="http://schemas.microsoft.com/office/drawing/2014/main" id="{6B4C91A1-5782-4973-9C32-AEFBA651BD3F}"/>
               </a:ext>
             </a:extLst>
           </p:cNvPr>
@@ -2847,7 +2847,7 @@
           <p:cNvPr id="5" name="">
             <a:extLst xmlns:a="http://schemas.openxmlformats.org/drawingml/2006/main">
               <a:ext uri="{FF2B5EF4-FFF2-40B4-BE49-F238E27FC236}">
-                <a16:creationId xmlns:a16="http://schemas.microsoft.com/office/drawing/2014/main" id="{A7B96BFA-2FF7-4FC1-AB77-BD7DDCE50BD7}"/>
+                <a16:creationId xmlns:a16="http://schemas.microsoft.com/office/drawing/2014/main" id="{62DC307D-13AC-4AF9-988C-5C5CBF2CA188}"/>
               </a:ext>
             </a:extLst>
           </p:cNvPr>
@@ -2902,7 +2902,7 @@
     </p:spTree>
     <p:extLst>
       <p:ext uri="{BB962C8B-B14F-4D97-AF65-F5344CB8AC3E}">
-        <p14:creationId xmlns:p14="http://schemas.microsoft.com/office/powerpoint/2010/main" val="744228423"/>
+        <p14:creationId xmlns:p14="http://schemas.microsoft.com/office/powerpoint/2010/main" val="2059500191"/>
       </p:ext>
     </p:extLst>
   </p:cSld>

--- a/4/РОП/Практики_1-8/Презентации/РОП_Практическая_4_АлбахтинИВ.pptx
+++ b/4/РОП/Практики_1-8/Презентации/РОП_Практическая_4_АлбахтинИВ.pptx
@@ -2,18 +2,18 @@
 <file path=ppt/presentation.xml><?xml version="1.0" encoding="utf-8"?>
 <p:presentation xmlns:p="http://schemas.openxmlformats.org/presentationml/2006/main">
   <p:sldMasterIdLst>
-    <p:sldMasterId xmlns:r="http://schemas.openxmlformats.org/officeDocument/2006/relationships" id="2147483648" r:id="R95ce2ec0edd44183"/>
+    <p:sldMasterId xmlns:r="http://schemas.openxmlformats.org/officeDocument/2006/relationships" id="2147483648" r:id="R10fcfbddeadf46f5"/>
   </p:sldMasterIdLst>
   <p:notesMasterIdLst>
-    <p:notesMasterId xmlns:r="http://schemas.openxmlformats.org/officeDocument/2006/relationships" r:id="R43d05a33ccf940d6"/>
+    <p:notesMasterId xmlns:r="http://schemas.openxmlformats.org/officeDocument/2006/relationships" r:id="R63c2fd6152004db8"/>
   </p:notesMasterIdLst>
   <p:sldIdLst>
-    <p:sldId xmlns:r="http://schemas.openxmlformats.org/officeDocument/2006/relationships" id="256" r:id="Rf0c37473942b4af5"/>
-    <p:sldId xmlns:r="http://schemas.openxmlformats.org/officeDocument/2006/relationships" id="257" r:id="Rf93501d0336d49bd"/>
-    <p:sldId xmlns:r="http://schemas.openxmlformats.org/officeDocument/2006/relationships" id="258" r:id="R7ebaa0627c814e8a"/>
-    <p:sldId xmlns:r="http://schemas.openxmlformats.org/officeDocument/2006/relationships" id="259" r:id="Ra786da778e214fd7"/>
-    <p:sldId xmlns:r="http://schemas.openxmlformats.org/officeDocument/2006/relationships" id="260" r:id="R88436ea78ce144ca"/>
-    <p:sldId xmlns:r="http://schemas.openxmlformats.org/officeDocument/2006/relationships" id="261" r:id="R0d8423e782124619"/>
+    <p:sldId xmlns:r="http://schemas.openxmlformats.org/officeDocument/2006/relationships" id="256" r:id="R7fb81f7ed87745e4"/>
+    <p:sldId xmlns:r="http://schemas.openxmlformats.org/officeDocument/2006/relationships" id="257" r:id="R6b3f705c5fd84b7c"/>
+    <p:sldId xmlns:r="http://schemas.openxmlformats.org/officeDocument/2006/relationships" id="258" r:id="Rce8ae4cd559e4990"/>
+    <p:sldId xmlns:r="http://schemas.openxmlformats.org/officeDocument/2006/relationships" id="259" r:id="Rae35eaa81e074705"/>
+    <p:sldId xmlns:r="http://schemas.openxmlformats.org/officeDocument/2006/relationships" id="260" r:id="Rfa5b3479c7024912"/>
+    <p:sldId xmlns:r="http://schemas.openxmlformats.org/officeDocument/2006/relationships" id="261" r:id="R30e40f3047f04da2"/>
   </p:sldIdLst>
   <p:sldSz cx="12192000" cy="6858000"/>
   <p:notesSz cx="6858000" cy="9144000"/>
@@ -203,16 +203,16 @@
         <a:srgbClr val="96607D"/>
       </a:folHlink>
     </a:clrScheme>
-    <a:fontScheme name="Office">
+    <a:fontScheme name="">
       <a:majorFont>
-        <a:latin typeface="Calibri Light"/>
-        <a:ea typeface="Calibri Light"/>
-        <a:cs typeface="Calibri Light"/>
+        <a:latin typeface="Aptos"/>
+        <a:ea typeface=""/>
+        <a:cs typeface=""/>
       </a:majorFont>
       <a:minorFont>
-        <a:latin typeface="Calibri"/>
-        <a:ea typeface="Calibri"/>
-        <a:cs typeface="Calibri"/>
+        <a:latin typeface="Aptos"/>
+        <a:ea typeface=""/>
+        <a:cs typeface=""/>
       </a:minorFont>
     </a:fontScheme>
     <a:fmtScheme name="ChatGPT">
@@ -869,6 +869,1661 @@
       <p:grpSpPr>
         <a:xfrm xmlns:a="http://schemas.openxmlformats.org/drawingml/2006/main"/>
       </p:grpSpPr>
+      <p:sp>
+        <p:nvSpPr>
+          <p:cNvPr id="3" name="Title">
+            <a:extLst xmlns:a="http://schemas.openxmlformats.org/drawingml/2006/main">
+              <a:ext uri="{FF2B5EF4-FFF2-40B4-BE49-F238E27FC236}">
+                <a16:creationId xmlns:a16="http://schemas.microsoft.com/office/drawing/2014/main" id="{E482153C-AF43-471E-B849-8DCD8EFB9036}"/>
+              </a:ext>
+            </a:extLst>
+          </p:cNvPr>
+          <p:cNvSpPr>
+            <a:spLocks xmlns:a="http://schemas.openxmlformats.org/drawingml/2006/main" noGrp="1"/>
+          </p:cNvSpPr>
+          <p:nvPr>
+            <p:ph type="title" idx="0"/>
+          </p:nvPr>
+        </p:nvSpPr>
+        <p:spPr>
+          <a:xfrm xmlns:a="http://schemas.openxmlformats.org/drawingml/2006/main">
+            <a:off x="1219200" y="2590800"/>
+            <a:ext cx="9753600" cy="990600"/>
+          </a:xfrm>
+          <a:prstGeom xmlns:a="http://schemas.openxmlformats.org/drawingml/2006/main" prst="rect">
+            <a:avLst/>
+          </a:prstGeom>
+          <a:noFill xmlns:a="http://schemas.openxmlformats.org/drawingml/2006/main"/>
+          <a:ln xmlns:a="http://schemas.openxmlformats.org/drawingml/2006/main">
+            <a:noFill/>
+            <a:prstDash val="solid"/>
+          </a:ln>
+        </p:spPr>
+        <p:txBody>
+          <a:bodyPr xmlns:a="http://schemas.openxmlformats.org/drawingml/2006/main" wrap="square" lIns="0" tIns="0" rIns="0" bIns="0" anchor="ctr">
+            <a:normAutofit/>
+          </a:bodyPr>
+          <a:lstStyle xmlns:a="http://schemas.openxmlformats.org/drawingml/2006/main">
+            <a:defPPr algn="ctr">
+              <a:defRPr sz="4800" b="1">
+                <a:solidFill>
+                  <a:schemeClr val="tx1"/>
+                </a:solidFill>
+                <a:latin typeface="+mj-lt"/>
+                <a:ea typeface="+mj-lt"/>
+                <a:cs typeface="+mj-lt"/>
+              </a:defRPr>
+            </a:defPPr>
+            <a:lvl1pPr marL="0" indent="0">
+              <a:lnSpc>
+                <a:spcPct val="110000"/>
+              </a:lnSpc>
+              <a:spcBef>
+                <a:spcPts val="0"/>
+              </a:spcBef>
+              <a:spcAft>
+                <a:spcPts val="0"/>
+              </a:spcAft>
+              <a:buNone/>
+            </a:lvl1pPr>
+            <a:lvl2pPr marL="0" indent="0">
+              <a:lnSpc>
+                <a:spcPct val="110000"/>
+              </a:lnSpc>
+              <a:spcBef>
+                <a:spcPts val="0"/>
+              </a:spcBef>
+              <a:spcAft>
+                <a:spcPts val="0"/>
+              </a:spcAft>
+              <a:buNone/>
+            </a:lvl2pPr>
+            <a:lvl3pPr marL="0" indent="0">
+              <a:lnSpc>
+                <a:spcPct val="110000"/>
+              </a:lnSpc>
+              <a:spcBef>
+                <a:spcPts val="0"/>
+              </a:spcBef>
+              <a:spcAft>
+                <a:spcPts val="0"/>
+              </a:spcAft>
+              <a:buNone/>
+            </a:lvl3pPr>
+            <a:lvl4pPr marL="0" indent="0">
+              <a:lnSpc>
+                <a:spcPct val="110000"/>
+              </a:lnSpc>
+              <a:spcBef>
+                <a:spcPts val="0"/>
+              </a:spcBef>
+              <a:spcAft>
+                <a:spcPts val="0"/>
+              </a:spcAft>
+              <a:buNone/>
+            </a:lvl4pPr>
+            <a:lvl5pPr marL="0" indent="0">
+              <a:lnSpc>
+                <a:spcPct val="110000"/>
+              </a:lnSpc>
+              <a:spcBef>
+                <a:spcPts val="0"/>
+              </a:spcBef>
+              <a:spcAft>
+                <a:spcPts val="0"/>
+              </a:spcAft>
+              <a:buNone/>
+            </a:lvl5pPr>
+            <a:lvl6pPr marL="0" indent="0">
+              <a:lnSpc>
+                <a:spcPct val="110000"/>
+              </a:lnSpc>
+              <a:spcBef>
+                <a:spcPts val="0"/>
+              </a:spcBef>
+              <a:spcAft>
+                <a:spcPts val="0"/>
+              </a:spcAft>
+              <a:buNone/>
+            </a:lvl6pPr>
+            <a:lvl7pPr marL="0" indent="0">
+              <a:lnSpc>
+                <a:spcPct val="110000"/>
+              </a:lnSpc>
+              <a:spcBef>
+                <a:spcPts val="0"/>
+              </a:spcBef>
+              <a:spcAft>
+                <a:spcPts val="0"/>
+              </a:spcAft>
+              <a:buNone/>
+            </a:lvl7pPr>
+            <a:lvl8pPr marL="0" indent="0">
+              <a:lnSpc>
+                <a:spcPct val="110000"/>
+              </a:lnSpc>
+              <a:spcBef>
+                <a:spcPts val="0"/>
+              </a:spcBef>
+              <a:spcAft>
+                <a:spcPts val="0"/>
+              </a:spcAft>
+              <a:buNone/>
+            </a:lvl8pPr>
+            <a:lvl9pPr marL="0" indent="0">
+              <a:lnSpc>
+                <a:spcPct val="110000"/>
+              </a:lnSpc>
+              <a:spcBef>
+                <a:spcPts val="0"/>
+              </a:spcBef>
+              <a:spcAft>
+                <a:spcPts val="0"/>
+              </a:spcAft>
+              <a:buNone/>
+            </a:lvl9pPr>
+          </a:lstStyle>
+          <a:p xmlns:a="http://schemas.openxmlformats.org/drawingml/2006/main"/>
+        </p:txBody>
+      </p:sp>
+      <p:sp>
+        <p:nvSpPr>
+          <p:cNvPr id="2" name="Subtitle">
+            <a:extLst xmlns:a="http://schemas.openxmlformats.org/drawingml/2006/main">
+              <a:ext uri="{FF2B5EF4-FFF2-40B4-BE49-F238E27FC236}">
+                <a16:creationId xmlns:a16="http://schemas.microsoft.com/office/drawing/2014/main" id="{4E220295-150B-49A7-8BA9-C1D99A1AF63E}"/>
+              </a:ext>
+            </a:extLst>
+          </p:cNvPr>
+          <p:cNvSpPr>
+            <a:spLocks xmlns:a="http://schemas.openxmlformats.org/drawingml/2006/main" noGrp="1"/>
+          </p:cNvSpPr>
+          <p:nvPr>
+            <p:ph type="subTitle" idx="1"/>
+          </p:nvPr>
+        </p:nvSpPr>
+        <p:spPr>
+          <a:xfrm xmlns:a="http://schemas.openxmlformats.org/drawingml/2006/main">
+            <a:off x="1828800" y="3771900"/>
+            <a:ext cx="8534400" cy="762000"/>
+          </a:xfrm>
+          <a:prstGeom xmlns:a="http://schemas.openxmlformats.org/drawingml/2006/main" prst="rect">
+            <a:avLst/>
+          </a:prstGeom>
+          <a:noFill xmlns:a="http://schemas.openxmlformats.org/drawingml/2006/main"/>
+          <a:ln xmlns:a="http://schemas.openxmlformats.org/drawingml/2006/main">
+            <a:noFill/>
+            <a:prstDash val="solid"/>
+          </a:ln>
+        </p:spPr>
+        <p:txBody>
+          <a:bodyPr xmlns:a="http://schemas.openxmlformats.org/drawingml/2006/main" wrap="square" lIns="0" tIns="0" rIns="0" bIns="0" anchor="ctr">
+            <a:normAutofit/>
+          </a:bodyPr>
+          <a:lstStyle xmlns:a="http://schemas.openxmlformats.org/drawingml/2006/main">
+            <a:defPPr algn="ctr">
+              <a:defRPr sz="2100" b="0">
+                <a:solidFill>
+                  <a:schemeClr val="tx1"/>
+                </a:solidFill>
+                <a:latin typeface="+mn-lt"/>
+                <a:ea typeface="+mn-lt"/>
+                <a:cs typeface="+mn-lt"/>
+              </a:defRPr>
+            </a:defPPr>
+            <a:lvl1pPr marL="0" indent="0">
+              <a:lnSpc>
+                <a:spcPct val="110000"/>
+              </a:lnSpc>
+              <a:spcBef>
+                <a:spcPts val="0"/>
+              </a:spcBef>
+              <a:spcAft>
+                <a:spcPts val="0"/>
+              </a:spcAft>
+              <a:buNone/>
+            </a:lvl1pPr>
+            <a:lvl2pPr marL="0" indent="0">
+              <a:lnSpc>
+                <a:spcPct val="110000"/>
+              </a:lnSpc>
+              <a:spcBef>
+                <a:spcPts val="0"/>
+              </a:spcBef>
+              <a:spcAft>
+                <a:spcPts val="0"/>
+              </a:spcAft>
+              <a:buNone/>
+            </a:lvl2pPr>
+            <a:lvl3pPr marL="0" indent="0">
+              <a:lnSpc>
+                <a:spcPct val="110000"/>
+              </a:lnSpc>
+              <a:spcBef>
+                <a:spcPts val="0"/>
+              </a:spcBef>
+              <a:spcAft>
+                <a:spcPts val="0"/>
+              </a:spcAft>
+              <a:buNone/>
+            </a:lvl3pPr>
+            <a:lvl4pPr marL="0" indent="0">
+              <a:lnSpc>
+                <a:spcPct val="110000"/>
+              </a:lnSpc>
+              <a:spcBef>
+                <a:spcPts val="0"/>
+              </a:spcBef>
+              <a:spcAft>
+                <a:spcPts val="0"/>
+              </a:spcAft>
+              <a:buNone/>
+            </a:lvl4pPr>
+            <a:lvl5pPr marL="0" indent="0">
+              <a:lnSpc>
+                <a:spcPct val="110000"/>
+              </a:lnSpc>
+              <a:spcBef>
+                <a:spcPts val="0"/>
+              </a:spcBef>
+              <a:spcAft>
+                <a:spcPts val="0"/>
+              </a:spcAft>
+              <a:buNone/>
+            </a:lvl5pPr>
+            <a:lvl6pPr marL="0" indent="0">
+              <a:lnSpc>
+                <a:spcPct val="110000"/>
+              </a:lnSpc>
+              <a:spcBef>
+                <a:spcPts val="0"/>
+              </a:spcBef>
+              <a:spcAft>
+                <a:spcPts val="0"/>
+              </a:spcAft>
+              <a:buNone/>
+            </a:lvl6pPr>
+            <a:lvl7pPr marL="0" indent="0">
+              <a:lnSpc>
+                <a:spcPct val="110000"/>
+              </a:lnSpc>
+              <a:spcBef>
+                <a:spcPts val="0"/>
+              </a:spcBef>
+              <a:spcAft>
+                <a:spcPts val="0"/>
+              </a:spcAft>
+              <a:buNone/>
+            </a:lvl7pPr>
+            <a:lvl8pPr marL="0" indent="0">
+              <a:lnSpc>
+                <a:spcPct val="110000"/>
+              </a:lnSpc>
+              <a:spcBef>
+                <a:spcPts val="0"/>
+              </a:spcBef>
+              <a:spcAft>
+                <a:spcPts val="0"/>
+              </a:spcAft>
+              <a:buNone/>
+            </a:lvl8pPr>
+            <a:lvl9pPr marL="0" indent="0">
+              <a:lnSpc>
+                <a:spcPct val="110000"/>
+              </a:lnSpc>
+              <a:spcBef>
+                <a:spcPts val="0"/>
+              </a:spcBef>
+              <a:spcAft>
+                <a:spcPts val="0"/>
+              </a:spcAft>
+              <a:buNone/>
+            </a:lvl9pPr>
+          </a:lstStyle>
+          <a:p xmlns:a="http://schemas.openxmlformats.org/drawingml/2006/main"/>
+        </p:txBody>
+      </p:sp>
+    </p:spTree>
+  </p:cSld>
+</p:sldLayout>
+</file>
+
+<file path=ppt/slideLayouts/slideLayout2.xml><?xml version="1.0" encoding="utf-8"?>
+<p:sldLayout xmlns:p="http://schemas.openxmlformats.org/presentationml/2006/main">
+  <p:cSld name="Section Header">
+    <p:spTree>
+      <p:nvGrpSpPr>
+        <p:cNvPr id="1" name=""/>
+        <p:cNvGrpSpPr/>
+        <p:nvPr/>
+      </p:nvGrpSpPr>
+      <p:grpSpPr>
+        <a:xfrm xmlns:a="http://schemas.openxmlformats.org/drawingml/2006/main"/>
+      </p:grpSpPr>
+      <p:sp>
+        <p:nvSpPr>
+          <p:cNvPr id="2" name="Section title">
+            <a:extLst xmlns:a="http://schemas.openxmlformats.org/drawingml/2006/main">
+              <a:ext uri="{FF2B5EF4-FFF2-40B4-BE49-F238E27FC236}">
+                <a16:creationId xmlns:a16="http://schemas.microsoft.com/office/drawing/2014/main" id="{D2D4D9F0-5495-4185-89FD-393BF5833216}"/>
+              </a:ext>
+            </a:extLst>
+          </p:cNvPr>
+          <p:cNvSpPr>
+            <a:spLocks xmlns:a="http://schemas.openxmlformats.org/drawingml/2006/main" noGrp="1"/>
+          </p:cNvSpPr>
+          <p:nvPr>
+            <p:ph type="title" idx="0"/>
+          </p:nvPr>
+        </p:nvSpPr>
+        <p:spPr>
+          <a:xfrm xmlns:a="http://schemas.openxmlformats.org/drawingml/2006/main">
+            <a:off x="1219200" y="2857500"/>
+            <a:ext cx="9753600" cy="1143000"/>
+          </a:xfrm>
+          <a:prstGeom xmlns:a="http://schemas.openxmlformats.org/drawingml/2006/main" prst="rect">
+            <a:avLst/>
+          </a:prstGeom>
+          <a:noFill xmlns:a="http://schemas.openxmlformats.org/drawingml/2006/main"/>
+          <a:ln xmlns:a="http://schemas.openxmlformats.org/drawingml/2006/main">
+            <a:noFill/>
+            <a:prstDash val="solid"/>
+          </a:ln>
+        </p:spPr>
+        <p:txBody>
+          <a:bodyPr xmlns:a="http://schemas.openxmlformats.org/drawingml/2006/main" wrap="square" lIns="0" tIns="0" rIns="0" bIns="0" anchor="ctr">
+            <a:normAutofit/>
+          </a:bodyPr>
+          <a:lstStyle xmlns:a="http://schemas.openxmlformats.org/drawingml/2006/main">
+            <a:defPPr algn="ctr">
+              <a:defRPr sz="4200" b="1">
+                <a:solidFill>
+                  <a:schemeClr val="tx1"/>
+                </a:solidFill>
+                <a:latin typeface="+mj-lt"/>
+                <a:ea typeface="+mj-lt"/>
+                <a:cs typeface="+mj-lt"/>
+              </a:defRPr>
+            </a:defPPr>
+            <a:lvl1pPr marL="0" indent="0">
+              <a:lnSpc>
+                <a:spcPct val="110000"/>
+              </a:lnSpc>
+              <a:spcBef>
+                <a:spcPts val="0"/>
+              </a:spcBef>
+              <a:spcAft>
+                <a:spcPts val="0"/>
+              </a:spcAft>
+              <a:buNone/>
+            </a:lvl1pPr>
+            <a:lvl2pPr marL="0" indent="0">
+              <a:lnSpc>
+                <a:spcPct val="110000"/>
+              </a:lnSpc>
+              <a:spcBef>
+                <a:spcPts val="0"/>
+              </a:spcBef>
+              <a:spcAft>
+                <a:spcPts val="0"/>
+              </a:spcAft>
+              <a:buNone/>
+            </a:lvl2pPr>
+            <a:lvl3pPr marL="0" indent="0">
+              <a:lnSpc>
+                <a:spcPct val="110000"/>
+              </a:lnSpc>
+              <a:spcBef>
+                <a:spcPts val="0"/>
+              </a:spcBef>
+              <a:spcAft>
+                <a:spcPts val="0"/>
+              </a:spcAft>
+              <a:buNone/>
+            </a:lvl3pPr>
+            <a:lvl4pPr marL="0" indent="0">
+              <a:lnSpc>
+                <a:spcPct val="110000"/>
+              </a:lnSpc>
+              <a:spcBef>
+                <a:spcPts val="0"/>
+              </a:spcBef>
+              <a:spcAft>
+                <a:spcPts val="0"/>
+              </a:spcAft>
+              <a:buNone/>
+            </a:lvl4pPr>
+            <a:lvl5pPr marL="0" indent="0">
+              <a:lnSpc>
+                <a:spcPct val="110000"/>
+              </a:lnSpc>
+              <a:spcBef>
+                <a:spcPts val="0"/>
+              </a:spcBef>
+              <a:spcAft>
+                <a:spcPts val="0"/>
+              </a:spcAft>
+              <a:buNone/>
+            </a:lvl5pPr>
+            <a:lvl6pPr marL="0" indent="0">
+              <a:lnSpc>
+                <a:spcPct val="110000"/>
+              </a:lnSpc>
+              <a:spcBef>
+                <a:spcPts val="0"/>
+              </a:spcBef>
+              <a:spcAft>
+                <a:spcPts val="0"/>
+              </a:spcAft>
+              <a:buNone/>
+            </a:lvl6pPr>
+            <a:lvl7pPr marL="0" indent="0">
+              <a:lnSpc>
+                <a:spcPct val="110000"/>
+              </a:lnSpc>
+              <a:spcBef>
+                <a:spcPts val="0"/>
+              </a:spcBef>
+              <a:spcAft>
+                <a:spcPts val="0"/>
+              </a:spcAft>
+              <a:buNone/>
+            </a:lvl7pPr>
+            <a:lvl8pPr marL="0" indent="0">
+              <a:lnSpc>
+                <a:spcPct val="110000"/>
+              </a:lnSpc>
+              <a:spcBef>
+                <a:spcPts val="0"/>
+              </a:spcBef>
+              <a:spcAft>
+                <a:spcPts val="0"/>
+              </a:spcAft>
+              <a:buNone/>
+            </a:lvl8pPr>
+            <a:lvl9pPr marL="0" indent="0">
+              <a:lnSpc>
+                <a:spcPct val="110000"/>
+              </a:lnSpc>
+              <a:spcBef>
+                <a:spcPts val="0"/>
+              </a:spcBef>
+              <a:spcAft>
+                <a:spcPts val="0"/>
+              </a:spcAft>
+              <a:buNone/>
+            </a:lvl9pPr>
+          </a:lstStyle>
+          <a:p xmlns:a="http://schemas.openxmlformats.org/drawingml/2006/main"/>
+        </p:txBody>
+      </p:sp>
+    </p:spTree>
+  </p:cSld>
+</p:sldLayout>
+</file>
+
+<file path=ppt/slideLayouts/slideLayout3.xml><?xml version="1.0" encoding="utf-8"?>
+<p:sldLayout xmlns:p="http://schemas.openxmlformats.org/presentationml/2006/main">
+  <p:cSld name="Title and Body">
+    <p:spTree>
+      <p:nvGrpSpPr>
+        <p:cNvPr id="1" name=""/>
+        <p:cNvGrpSpPr/>
+        <p:nvPr/>
+      </p:nvGrpSpPr>
+      <p:grpSpPr>
+        <a:xfrm xmlns:a="http://schemas.openxmlformats.org/drawingml/2006/main"/>
+      </p:grpSpPr>
+      <p:sp>
+        <p:nvSpPr>
+          <p:cNvPr id="3" name="Title">
+            <a:extLst xmlns:a="http://schemas.openxmlformats.org/drawingml/2006/main">
+              <a:ext uri="{FF2B5EF4-FFF2-40B4-BE49-F238E27FC236}">
+                <a16:creationId xmlns:a16="http://schemas.microsoft.com/office/drawing/2014/main" id="{C6CADF67-9A16-496B-8CCE-369C7E54AEBA}"/>
+              </a:ext>
+            </a:extLst>
+          </p:cNvPr>
+          <p:cNvSpPr>
+            <a:spLocks xmlns:a="http://schemas.openxmlformats.org/drawingml/2006/main" noGrp="1"/>
+          </p:cNvSpPr>
+          <p:nvPr>
+            <p:ph type="title" idx="0"/>
+          </p:nvPr>
+        </p:nvSpPr>
+        <p:spPr>
+          <a:xfrm xmlns:a="http://schemas.openxmlformats.org/drawingml/2006/main">
+            <a:off x="685800" y="533400"/>
+            <a:ext cx="10820400" cy="838200"/>
+          </a:xfrm>
+          <a:prstGeom xmlns:a="http://schemas.openxmlformats.org/drawingml/2006/main" prst="rect">
+            <a:avLst/>
+          </a:prstGeom>
+          <a:noFill xmlns:a="http://schemas.openxmlformats.org/drawingml/2006/main"/>
+          <a:ln xmlns:a="http://schemas.openxmlformats.org/drawingml/2006/main">
+            <a:noFill/>
+            <a:prstDash val="solid"/>
+          </a:ln>
+        </p:spPr>
+        <p:txBody>
+          <a:bodyPr xmlns:a="http://schemas.openxmlformats.org/drawingml/2006/main" wrap="square" lIns="0" tIns="0" rIns="0" bIns="0" anchor="t">
+            <a:normAutofit/>
+          </a:bodyPr>
+          <a:lstStyle xmlns:a="http://schemas.openxmlformats.org/drawingml/2006/main">
+            <a:defPPr algn="l">
+              <a:defRPr sz="3300" b="1">
+                <a:solidFill>
+                  <a:schemeClr val="tx1"/>
+                </a:solidFill>
+                <a:latin typeface="+mj-lt"/>
+                <a:ea typeface="+mj-lt"/>
+                <a:cs typeface="+mj-lt"/>
+              </a:defRPr>
+            </a:defPPr>
+            <a:lvl1pPr marL="0" indent="0">
+              <a:lnSpc>
+                <a:spcPct val="110000"/>
+              </a:lnSpc>
+              <a:spcBef>
+                <a:spcPts val="0"/>
+              </a:spcBef>
+              <a:spcAft>
+                <a:spcPts val="0"/>
+              </a:spcAft>
+              <a:buNone/>
+            </a:lvl1pPr>
+            <a:lvl2pPr marL="0" indent="0">
+              <a:lnSpc>
+                <a:spcPct val="110000"/>
+              </a:lnSpc>
+              <a:spcBef>
+                <a:spcPts val="0"/>
+              </a:spcBef>
+              <a:spcAft>
+                <a:spcPts val="0"/>
+              </a:spcAft>
+              <a:buNone/>
+            </a:lvl2pPr>
+            <a:lvl3pPr marL="0" indent="0">
+              <a:lnSpc>
+                <a:spcPct val="110000"/>
+              </a:lnSpc>
+              <a:spcBef>
+                <a:spcPts val="0"/>
+              </a:spcBef>
+              <a:spcAft>
+                <a:spcPts val="0"/>
+              </a:spcAft>
+              <a:buNone/>
+            </a:lvl3pPr>
+            <a:lvl4pPr marL="0" indent="0">
+              <a:lnSpc>
+                <a:spcPct val="110000"/>
+              </a:lnSpc>
+              <a:spcBef>
+                <a:spcPts val="0"/>
+              </a:spcBef>
+              <a:spcAft>
+                <a:spcPts val="0"/>
+              </a:spcAft>
+              <a:buNone/>
+            </a:lvl4pPr>
+            <a:lvl5pPr marL="0" indent="0">
+              <a:lnSpc>
+                <a:spcPct val="110000"/>
+              </a:lnSpc>
+              <a:spcBef>
+                <a:spcPts val="0"/>
+              </a:spcBef>
+              <a:spcAft>
+                <a:spcPts val="0"/>
+              </a:spcAft>
+              <a:buNone/>
+            </a:lvl5pPr>
+            <a:lvl6pPr marL="0" indent="0">
+              <a:lnSpc>
+                <a:spcPct val="110000"/>
+              </a:lnSpc>
+              <a:spcBef>
+                <a:spcPts val="0"/>
+              </a:spcBef>
+              <a:spcAft>
+                <a:spcPts val="0"/>
+              </a:spcAft>
+              <a:buNone/>
+            </a:lvl6pPr>
+            <a:lvl7pPr marL="0" indent="0">
+              <a:lnSpc>
+                <a:spcPct val="110000"/>
+              </a:lnSpc>
+              <a:spcBef>
+                <a:spcPts val="0"/>
+              </a:spcBef>
+              <a:spcAft>
+                <a:spcPts val="0"/>
+              </a:spcAft>
+              <a:buNone/>
+            </a:lvl7pPr>
+            <a:lvl8pPr marL="0" indent="0">
+              <a:lnSpc>
+                <a:spcPct val="110000"/>
+              </a:lnSpc>
+              <a:spcBef>
+                <a:spcPts val="0"/>
+              </a:spcBef>
+              <a:spcAft>
+                <a:spcPts val="0"/>
+              </a:spcAft>
+              <a:buNone/>
+            </a:lvl8pPr>
+            <a:lvl9pPr marL="0" indent="0">
+              <a:lnSpc>
+                <a:spcPct val="110000"/>
+              </a:lnSpc>
+              <a:spcBef>
+                <a:spcPts val="0"/>
+              </a:spcBef>
+              <a:spcAft>
+                <a:spcPts val="0"/>
+              </a:spcAft>
+              <a:buNone/>
+            </a:lvl9pPr>
+          </a:lstStyle>
+          <a:p xmlns:a="http://schemas.openxmlformats.org/drawingml/2006/main"/>
+        </p:txBody>
+      </p:sp>
+      <p:sp>
+        <p:nvSpPr>
+          <p:cNvPr id="2" name="Body">
+            <a:extLst xmlns:a="http://schemas.openxmlformats.org/drawingml/2006/main">
+              <a:ext uri="{FF2B5EF4-FFF2-40B4-BE49-F238E27FC236}">
+                <a16:creationId xmlns:a16="http://schemas.microsoft.com/office/drawing/2014/main" id="{2F7443F9-FA03-4D16-AE1D-18E6FFC4F7C8}"/>
+              </a:ext>
+            </a:extLst>
+          </p:cNvPr>
+          <p:cNvSpPr>
+            <a:spLocks xmlns:a="http://schemas.openxmlformats.org/drawingml/2006/main" noGrp="1"/>
+          </p:cNvSpPr>
+          <p:nvPr>
+            <p:ph type="body" idx="1"/>
+          </p:nvPr>
+        </p:nvSpPr>
+        <p:spPr>
+          <a:xfrm xmlns:a="http://schemas.openxmlformats.org/drawingml/2006/main">
+            <a:off x="685800" y="1905000"/>
+            <a:ext cx="10820400" cy="4267200"/>
+          </a:xfrm>
+          <a:prstGeom xmlns:a="http://schemas.openxmlformats.org/drawingml/2006/main" prst="rect">
+            <a:avLst/>
+          </a:prstGeom>
+          <a:noFill xmlns:a="http://schemas.openxmlformats.org/drawingml/2006/main"/>
+          <a:ln xmlns:a="http://schemas.openxmlformats.org/drawingml/2006/main">
+            <a:noFill/>
+            <a:prstDash val="solid"/>
+          </a:ln>
+        </p:spPr>
+        <p:txBody>
+          <a:bodyPr xmlns:a="http://schemas.openxmlformats.org/drawingml/2006/main" wrap="square" lIns="0" tIns="0" rIns="0" bIns="0" anchor="t">
+            <a:normAutofit/>
+          </a:bodyPr>
+          <a:lstStyle xmlns:a="http://schemas.openxmlformats.org/drawingml/2006/main">
+            <a:defPPr algn="l">
+              <a:defRPr sz="2250" b="0">
+                <a:solidFill>
+                  <a:schemeClr val="tx1"/>
+                </a:solidFill>
+                <a:latin typeface="+mn-lt"/>
+                <a:ea typeface="+mn-lt"/>
+                <a:cs typeface="+mn-lt"/>
+              </a:defRPr>
+            </a:defPPr>
+            <a:lvl1pPr marL="228600" indent="-228600">
+              <a:lnSpc>
+                <a:spcPct val="110000"/>
+              </a:lnSpc>
+              <a:spcBef>
+                <a:spcPts val="0"/>
+              </a:spcBef>
+              <a:spcAft>
+                <a:spcPts val="1200"/>
+              </a:spcAft>
+              <a:buChar char="•"/>
+            </a:lvl1pPr>
+            <a:lvl2pPr marL="533400" indent="-228600">
+              <a:lnSpc>
+                <a:spcPct val="110000"/>
+              </a:lnSpc>
+              <a:spcBef>
+                <a:spcPts val="0"/>
+              </a:spcBef>
+              <a:spcAft>
+                <a:spcPts val="1200"/>
+              </a:spcAft>
+              <a:buChar char="•"/>
+            </a:lvl2pPr>
+            <a:lvl3pPr marL="838200" indent="-228600">
+              <a:lnSpc>
+                <a:spcPct val="110000"/>
+              </a:lnSpc>
+              <a:spcBef>
+                <a:spcPts val="0"/>
+              </a:spcBef>
+              <a:spcAft>
+                <a:spcPts val="1200"/>
+              </a:spcAft>
+              <a:buChar char="•"/>
+            </a:lvl3pPr>
+            <a:lvl4pPr marL="1143000" indent="-228600">
+              <a:lnSpc>
+                <a:spcPct val="110000"/>
+              </a:lnSpc>
+              <a:spcBef>
+                <a:spcPts val="0"/>
+              </a:spcBef>
+              <a:spcAft>
+                <a:spcPts val="1200"/>
+              </a:spcAft>
+              <a:buChar char="•"/>
+            </a:lvl4pPr>
+            <a:lvl5pPr marL="1447800" indent="-228600">
+              <a:lnSpc>
+                <a:spcPct val="110000"/>
+              </a:lnSpc>
+              <a:spcBef>
+                <a:spcPts val="0"/>
+              </a:spcBef>
+              <a:spcAft>
+                <a:spcPts val="1200"/>
+              </a:spcAft>
+              <a:buChar char="•"/>
+            </a:lvl5pPr>
+            <a:lvl6pPr marL="1752600" indent="-228600">
+              <a:lnSpc>
+                <a:spcPct val="110000"/>
+              </a:lnSpc>
+              <a:spcBef>
+                <a:spcPts val="0"/>
+              </a:spcBef>
+              <a:spcAft>
+                <a:spcPts val="1200"/>
+              </a:spcAft>
+              <a:buChar char="•"/>
+            </a:lvl6pPr>
+            <a:lvl7pPr marL="2057400" indent="-228600">
+              <a:lnSpc>
+                <a:spcPct val="110000"/>
+              </a:lnSpc>
+              <a:spcBef>
+                <a:spcPts val="0"/>
+              </a:spcBef>
+              <a:spcAft>
+                <a:spcPts val="1200"/>
+              </a:spcAft>
+              <a:buChar char="•"/>
+            </a:lvl7pPr>
+            <a:lvl8pPr marL="2362200" indent="-228600">
+              <a:lnSpc>
+                <a:spcPct val="110000"/>
+              </a:lnSpc>
+              <a:spcBef>
+                <a:spcPts val="0"/>
+              </a:spcBef>
+              <a:spcAft>
+                <a:spcPts val="1200"/>
+              </a:spcAft>
+              <a:buChar char="•"/>
+            </a:lvl8pPr>
+            <a:lvl9pPr marL="2667000" indent="-228600">
+              <a:lnSpc>
+                <a:spcPct val="110000"/>
+              </a:lnSpc>
+              <a:spcBef>
+                <a:spcPts val="0"/>
+              </a:spcBef>
+              <a:spcAft>
+                <a:spcPts val="1200"/>
+              </a:spcAft>
+              <a:buChar char="•"/>
+            </a:lvl9pPr>
+          </a:lstStyle>
+          <a:p xmlns:a="http://schemas.openxmlformats.org/drawingml/2006/main"/>
+        </p:txBody>
+      </p:sp>
+    </p:spTree>
+  </p:cSld>
+</p:sldLayout>
+</file>
+
+<file path=ppt/slideLayouts/slideLayout4.xml><?xml version="1.0" encoding="utf-8"?>
+<p:sldLayout xmlns:p="http://schemas.openxmlformats.org/presentationml/2006/main">
+  <p:cSld name="Title and Two Column">
+    <p:spTree>
+      <p:nvGrpSpPr>
+        <p:cNvPr id="1" name=""/>
+        <p:cNvGrpSpPr/>
+        <p:nvPr/>
+      </p:nvGrpSpPr>
+      <p:grpSpPr>
+        <a:xfrm xmlns:a="http://schemas.openxmlformats.org/drawingml/2006/main"/>
+      </p:grpSpPr>
+      <p:sp>
+        <p:nvSpPr>
+          <p:cNvPr id="4" name="Title">
+            <a:extLst xmlns:a="http://schemas.openxmlformats.org/drawingml/2006/main">
+              <a:ext uri="{FF2B5EF4-FFF2-40B4-BE49-F238E27FC236}">
+                <a16:creationId xmlns:a16="http://schemas.microsoft.com/office/drawing/2014/main" id="{D7A386F1-B482-4A75-BC8D-25048E8EC86A}"/>
+              </a:ext>
+            </a:extLst>
+          </p:cNvPr>
+          <p:cNvSpPr>
+            <a:spLocks xmlns:a="http://schemas.openxmlformats.org/drawingml/2006/main" noGrp="1"/>
+          </p:cNvSpPr>
+          <p:nvPr>
+            <p:ph type="title" idx="0"/>
+          </p:nvPr>
+        </p:nvSpPr>
+        <p:spPr>
+          <a:xfrm xmlns:a="http://schemas.openxmlformats.org/drawingml/2006/main">
+            <a:off x="685800" y="533400"/>
+            <a:ext cx="10820400" cy="838200"/>
+          </a:xfrm>
+          <a:prstGeom xmlns:a="http://schemas.openxmlformats.org/drawingml/2006/main" prst="rect">
+            <a:avLst/>
+          </a:prstGeom>
+          <a:noFill xmlns:a="http://schemas.openxmlformats.org/drawingml/2006/main"/>
+          <a:ln xmlns:a="http://schemas.openxmlformats.org/drawingml/2006/main">
+            <a:noFill/>
+            <a:prstDash val="solid"/>
+          </a:ln>
+        </p:spPr>
+        <p:txBody>
+          <a:bodyPr xmlns:a="http://schemas.openxmlformats.org/drawingml/2006/main" wrap="square" lIns="0" tIns="0" rIns="0" bIns="0" anchor="t">
+            <a:normAutofit/>
+          </a:bodyPr>
+          <a:lstStyle xmlns:a="http://schemas.openxmlformats.org/drawingml/2006/main">
+            <a:defPPr algn="l">
+              <a:defRPr sz="3300" b="1">
+                <a:solidFill>
+                  <a:schemeClr val="tx1"/>
+                </a:solidFill>
+                <a:latin typeface="+mj-lt"/>
+                <a:ea typeface="+mj-lt"/>
+                <a:cs typeface="+mj-lt"/>
+              </a:defRPr>
+            </a:defPPr>
+            <a:lvl1pPr marL="0" indent="0">
+              <a:lnSpc>
+                <a:spcPct val="110000"/>
+              </a:lnSpc>
+              <a:spcBef>
+                <a:spcPts val="0"/>
+              </a:spcBef>
+              <a:spcAft>
+                <a:spcPts val="0"/>
+              </a:spcAft>
+              <a:buNone/>
+            </a:lvl1pPr>
+            <a:lvl2pPr marL="0" indent="0">
+              <a:lnSpc>
+                <a:spcPct val="110000"/>
+              </a:lnSpc>
+              <a:spcBef>
+                <a:spcPts val="0"/>
+              </a:spcBef>
+              <a:spcAft>
+                <a:spcPts val="0"/>
+              </a:spcAft>
+              <a:buNone/>
+            </a:lvl2pPr>
+            <a:lvl3pPr marL="0" indent="0">
+              <a:lnSpc>
+                <a:spcPct val="110000"/>
+              </a:lnSpc>
+              <a:spcBef>
+                <a:spcPts val="0"/>
+              </a:spcBef>
+              <a:spcAft>
+                <a:spcPts val="0"/>
+              </a:spcAft>
+              <a:buNone/>
+            </a:lvl3pPr>
+            <a:lvl4pPr marL="0" indent="0">
+              <a:lnSpc>
+                <a:spcPct val="110000"/>
+              </a:lnSpc>
+              <a:spcBef>
+                <a:spcPts val="0"/>
+              </a:spcBef>
+              <a:spcAft>
+                <a:spcPts val="0"/>
+              </a:spcAft>
+              <a:buNone/>
+            </a:lvl4pPr>
+            <a:lvl5pPr marL="0" indent="0">
+              <a:lnSpc>
+                <a:spcPct val="110000"/>
+              </a:lnSpc>
+              <a:spcBef>
+                <a:spcPts val="0"/>
+              </a:spcBef>
+              <a:spcAft>
+                <a:spcPts val="0"/>
+              </a:spcAft>
+              <a:buNone/>
+            </a:lvl5pPr>
+            <a:lvl6pPr marL="0" indent="0">
+              <a:lnSpc>
+                <a:spcPct val="110000"/>
+              </a:lnSpc>
+              <a:spcBef>
+                <a:spcPts val="0"/>
+              </a:spcBef>
+              <a:spcAft>
+                <a:spcPts val="0"/>
+              </a:spcAft>
+              <a:buNone/>
+            </a:lvl6pPr>
+            <a:lvl7pPr marL="0" indent="0">
+              <a:lnSpc>
+                <a:spcPct val="110000"/>
+              </a:lnSpc>
+              <a:spcBef>
+                <a:spcPts val="0"/>
+              </a:spcBef>
+              <a:spcAft>
+                <a:spcPts val="0"/>
+              </a:spcAft>
+              <a:buNone/>
+            </a:lvl7pPr>
+            <a:lvl8pPr marL="0" indent="0">
+              <a:lnSpc>
+                <a:spcPct val="110000"/>
+              </a:lnSpc>
+              <a:spcBef>
+                <a:spcPts val="0"/>
+              </a:spcBef>
+              <a:spcAft>
+                <a:spcPts val="0"/>
+              </a:spcAft>
+              <a:buNone/>
+            </a:lvl8pPr>
+            <a:lvl9pPr marL="0" indent="0">
+              <a:lnSpc>
+                <a:spcPct val="110000"/>
+              </a:lnSpc>
+              <a:spcBef>
+                <a:spcPts val="0"/>
+              </a:spcBef>
+              <a:spcAft>
+                <a:spcPts val="0"/>
+              </a:spcAft>
+              <a:buNone/>
+            </a:lvl9pPr>
+          </a:lstStyle>
+          <a:p xmlns:a="http://schemas.openxmlformats.org/drawingml/2006/main"/>
+        </p:txBody>
+      </p:sp>
+      <p:sp>
+        <p:nvSpPr>
+          <p:cNvPr id="2" name="Left column">
+            <a:extLst xmlns:a="http://schemas.openxmlformats.org/drawingml/2006/main">
+              <a:ext uri="{FF2B5EF4-FFF2-40B4-BE49-F238E27FC236}">
+                <a16:creationId xmlns:a16="http://schemas.microsoft.com/office/drawing/2014/main" id="{58800D7D-7E95-49B0-BCAB-CAD82CC94DA0}"/>
+              </a:ext>
+            </a:extLst>
+          </p:cNvPr>
+          <p:cNvSpPr>
+            <a:spLocks xmlns:a="http://schemas.openxmlformats.org/drawingml/2006/main" noGrp="1"/>
+          </p:cNvSpPr>
+          <p:nvPr>
+            <p:ph type="body" idx="1"/>
+          </p:nvPr>
+        </p:nvSpPr>
+        <p:spPr>
+          <a:xfrm xmlns:a="http://schemas.openxmlformats.org/drawingml/2006/main">
+            <a:off x="685800" y="1905000"/>
+            <a:ext cx="5029200" cy="4267200"/>
+          </a:xfrm>
+          <a:prstGeom xmlns:a="http://schemas.openxmlformats.org/drawingml/2006/main" prst="rect">
+            <a:avLst/>
+          </a:prstGeom>
+          <a:noFill xmlns:a="http://schemas.openxmlformats.org/drawingml/2006/main"/>
+          <a:ln xmlns:a="http://schemas.openxmlformats.org/drawingml/2006/main">
+            <a:noFill/>
+            <a:prstDash val="solid"/>
+          </a:ln>
+        </p:spPr>
+        <p:txBody>
+          <a:bodyPr xmlns:a="http://schemas.openxmlformats.org/drawingml/2006/main" wrap="square" lIns="0" tIns="0" rIns="0" bIns="0" anchor="t">
+            <a:normAutofit/>
+          </a:bodyPr>
+          <a:lstStyle xmlns:a="http://schemas.openxmlformats.org/drawingml/2006/main">
+            <a:defPPr algn="l">
+              <a:defRPr sz="2100" b="0">
+                <a:solidFill>
+                  <a:schemeClr val="tx1"/>
+                </a:solidFill>
+                <a:latin typeface="+mn-lt"/>
+                <a:ea typeface="+mn-lt"/>
+                <a:cs typeface="+mn-lt"/>
+              </a:defRPr>
+            </a:defPPr>
+            <a:lvl1pPr marL="228600" indent="-228600">
+              <a:lnSpc>
+                <a:spcPct val="110000"/>
+              </a:lnSpc>
+              <a:spcBef>
+                <a:spcPts val="0"/>
+              </a:spcBef>
+              <a:spcAft>
+                <a:spcPts val="1200"/>
+              </a:spcAft>
+              <a:buChar char="•"/>
+            </a:lvl1pPr>
+            <a:lvl2pPr marL="533400" indent="-228600">
+              <a:lnSpc>
+                <a:spcPct val="110000"/>
+              </a:lnSpc>
+              <a:spcBef>
+                <a:spcPts val="0"/>
+              </a:spcBef>
+              <a:spcAft>
+                <a:spcPts val="1200"/>
+              </a:spcAft>
+              <a:buChar char="•"/>
+            </a:lvl2pPr>
+            <a:lvl3pPr marL="838200" indent="-228600">
+              <a:lnSpc>
+                <a:spcPct val="110000"/>
+              </a:lnSpc>
+              <a:spcBef>
+                <a:spcPts val="0"/>
+              </a:spcBef>
+              <a:spcAft>
+                <a:spcPts val="1200"/>
+              </a:spcAft>
+              <a:buChar char="•"/>
+            </a:lvl3pPr>
+            <a:lvl4pPr marL="1143000" indent="-228600">
+              <a:lnSpc>
+                <a:spcPct val="110000"/>
+              </a:lnSpc>
+              <a:spcBef>
+                <a:spcPts val="0"/>
+              </a:spcBef>
+              <a:spcAft>
+                <a:spcPts val="1200"/>
+              </a:spcAft>
+              <a:buChar char="•"/>
+            </a:lvl4pPr>
+            <a:lvl5pPr marL="1447800" indent="-228600">
+              <a:lnSpc>
+                <a:spcPct val="110000"/>
+              </a:lnSpc>
+              <a:spcBef>
+                <a:spcPts val="0"/>
+              </a:spcBef>
+              <a:spcAft>
+                <a:spcPts val="1200"/>
+              </a:spcAft>
+              <a:buChar char="•"/>
+            </a:lvl5pPr>
+            <a:lvl6pPr marL="1752600" indent="-228600">
+              <a:lnSpc>
+                <a:spcPct val="110000"/>
+              </a:lnSpc>
+              <a:spcBef>
+                <a:spcPts val="0"/>
+              </a:spcBef>
+              <a:spcAft>
+                <a:spcPts val="1200"/>
+              </a:spcAft>
+              <a:buChar char="•"/>
+            </a:lvl6pPr>
+            <a:lvl7pPr marL="2057400" indent="-228600">
+              <a:lnSpc>
+                <a:spcPct val="110000"/>
+              </a:lnSpc>
+              <a:spcBef>
+                <a:spcPts val="0"/>
+              </a:spcBef>
+              <a:spcAft>
+                <a:spcPts val="1200"/>
+              </a:spcAft>
+              <a:buChar char="•"/>
+            </a:lvl7pPr>
+            <a:lvl8pPr marL="2362200" indent="-228600">
+              <a:lnSpc>
+                <a:spcPct val="110000"/>
+              </a:lnSpc>
+              <a:spcBef>
+                <a:spcPts val="0"/>
+              </a:spcBef>
+              <a:spcAft>
+                <a:spcPts val="1200"/>
+              </a:spcAft>
+              <a:buChar char="•"/>
+            </a:lvl8pPr>
+            <a:lvl9pPr marL="2667000" indent="-228600">
+              <a:lnSpc>
+                <a:spcPct val="110000"/>
+              </a:lnSpc>
+              <a:spcBef>
+                <a:spcPts val="0"/>
+              </a:spcBef>
+              <a:spcAft>
+                <a:spcPts val="1200"/>
+              </a:spcAft>
+              <a:buChar char="•"/>
+            </a:lvl9pPr>
+          </a:lstStyle>
+          <a:p xmlns:a="http://schemas.openxmlformats.org/drawingml/2006/main"/>
+        </p:txBody>
+      </p:sp>
+      <p:sp>
+        <p:nvSpPr>
+          <p:cNvPr id="3" name="Right column">
+            <a:extLst xmlns:a="http://schemas.openxmlformats.org/drawingml/2006/main">
+              <a:ext uri="{FF2B5EF4-FFF2-40B4-BE49-F238E27FC236}">
+                <a16:creationId xmlns:a16="http://schemas.microsoft.com/office/drawing/2014/main" id="{4CDA9149-1E41-4EBE-A98F-6A1C1493DA3E}"/>
+              </a:ext>
+            </a:extLst>
+          </p:cNvPr>
+          <p:cNvSpPr>
+            <a:spLocks xmlns:a="http://schemas.openxmlformats.org/drawingml/2006/main" noGrp="1"/>
+          </p:cNvSpPr>
+          <p:nvPr>
+            <p:ph type="body" idx="2"/>
+          </p:nvPr>
+        </p:nvSpPr>
+        <p:spPr>
+          <a:xfrm xmlns:a="http://schemas.openxmlformats.org/drawingml/2006/main">
+            <a:off x="6477000" y="1905000"/>
+            <a:ext cx="5029200" cy="4267200"/>
+          </a:xfrm>
+          <a:prstGeom xmlns:a="http://schemas.openxmlformats.org/drawingml/2006/main" prst="rect">
+            <a:avLst/>
+          </a:prstGeom>
+          <a:noFill xmlns:a="http://schemas.openxmlformats.org/drawingml/2006/main"/>
+          <a:ln xmlns:a="http://schemas.openxmlformats.org/drawingml/2006/main">
+            <a:noFill/>
+            <a:prstDash val="solid"/>
+          </a:ln>
+        </p:spPr>
+        <p:txBody>
+          <a:bodyPr xmlns:a="http://schemas.openxmlformats.org/drawingml/2006/main" wrap="square" lIns="0" tIns="0" rIns="0" bIns="0" anchor="t">
+            <a:normAutofit/>
+          </a:bodyPr>
+          <a:lstStyle xmlns:a="http://schemas.openxmlformats.org/drawingml/2006/main">
+            <a:defPPr algn="l">
+              <a:defRPr sz="2100" b="0">
+                <a:solidFill>
+                  <a:schemeClr val="tx1"/>
+                </a:solidFill>
+                <a:latin typeface="+mn-lt"/>
+                <a:ea typeface="+mn-lt"/>
+                <a:cs typeface="+mn-lt"/>
+              </a:defRPr>
+            </a:defPPr>
+            <a:lvl1pPr marL="228600" indent="-228600">
+              <a:lnSpc>
+                <a:spcPct val="110000"/>
+              </a:lnSpc>
+              <a:spcBef>
+                <a:spcPts val="0"/>
+              </a:spcBef>
+              <a:spcAft>
+                <a:spcPts val="1200"/>
+              </a:spcAft>
+              <a:buChar char="•"/>
+            </a:lvl1pPr>
+            <a:lvl2pPr marL="533400" indent="-228600">
+              <a:lnSpc>
+                <a:spcPct val="110000"/>
+              </a:lnSpc>
+              <a:spcBef>
+                <a:spcPts val="0"/>
+              </a:spcBef>
+              <a:spcAft>
+                <a:spcPts val="1200"/>
+              </a:spcAft>
+              <a:buChar char="•"/>
+            </a:lvl2pPr>
+            <a:lvl3pPr marL="838200" indent="-228600">
+              <a:lnSpc>
+                <a:spcPct val="110000"/>
+              </a:lnSpc>
+              <a:spcBef>
+                <a:spcPts val="0"/>
+              </a:spcBef>
+              <a:spcAft>
+                <a:spcPts val="1200"/>
+              </a:spcAft>
+              <a:buChar char="•"/>
+            </a:lvl3pPr>
+            <a:lvl4pPr marL="1143000" indent="-228600">
+              <a:lnSpc>
+                <a:spcPct val="110000"/>
+              </a:lnSpc>
+              <a:spcBef>
+                <a:spcPts val="0"/>
+              </a:spcBef>
+              <a:spcAft>
+                <a:spcPts val="1200"/>
+              </a:spcAft>
+              <a:buChar char="•"/>
+            </a:lvl4pPr>
+            <a:lvl5pPr marL="1447800" indent="-228600">
+              <a:lnSpc>
+                <a:spcPct val="110000"/>
+              </a:lnSpc>
+              <a:spcBef>
+                <a:spcPts val="0"/>
+              </a:spcBef>
+              <a:spcAft>
+                <a:spcPts val="1200"/>
+              </a:spcAft>
+              <a:buChar char="•"/>
+            </a:lvl5pPr>
+            <a:lvl6pPr marL="1752600" indent="-228600">
+              <a:lnSpc>
+                <a:spcPct val="110000"/>
+              </a:lnSpc>
+              <a:spcBef>
+                <a:spcPts val="0"/>
+              </a:spcBef>
+              <a:spcAft>
+                <a:spcPts val="1200"/>
+              </a:spcAft>
+              <a:buChar char="•"/>
+            </a:lvl6pPr>
+            <a:lvl7pPr marL="2057400" indent="-228600">
+              <a:lnSpc>
+                <a:spcPct val="110000"/>
+              </a:lnSpc>
+              <a:spcBef>
+                <a:spcPts val="0"/>
+              </a:spcBef>
+              <a:spcAft>
+                <a:spcPts val="1200"/>
+              </a:spcAft>
+              <a:buChar char="•"/>
+            </a:lvl7pPr>
+            <a:lvl8pPr marL="2362200" indent="-228600">
+              <a:lnSpc>
+                <a:spcPct val="110000"/>
+              </a:lnSpc>
+              <a:spcBef>
+                <a:spcPts val="0"/>
+              </a:spcBef>
+              <a:spcAft>
+                <a:spcPts val="1200"/>
+              </a:spcAft>
+              <a:buChar char="•"/>
+            </a:lvl8pPr>
+            <a:lvl9pPr marL="2667000" indent="-228600">
+              <a:lnSpc>
+                <a:spcPct val="110000"/>
+              </a:lnSpc>
+              <a:spcBef>
+                <a:spcPts val="0"/>
+              </a:spcBef>
+              <a:spcAft>
+                <a:spcPts val="1200"/>
+              </a:spcAft>
+              <a:buChar char="•"/>
+            </a:lvl9pPr>
+          </a:lstStyle>
+          <a:p xmlns:a="http://schemas.openxmlformats.org/drawingml/2006/main"/>
+        </p:txBody>
+      </p:sp>
+    </p:spTree>
+  </p:cSld>
+</p:sldLayout>
+</file>
+
+<file path=ppt/slideLayouts/slideLayout5.xml><?xml version="1.0" encoding="utf-8"?>
+<p:sldLayout xmlns:p="http://schemas.openxmlformats.org/presentationml/2006/main">
+  <p:cSld name="Title and One Column">
+    <p:spTree>
+      <p:nvGrpSpPr>
+        <p:cNvPr id="1" name=""/>
+        <p:cNvGrpSpPr/>
+        <p:nvPr/>
+      </p:nvGrpSpPr>
+      <p:grpSpPr>
+        <a:xfrm xmlns:a="http://schemas.openxmlformats.org/drawingml/2006/main"/>
+      </p:grpSpPr>
+      <p:sp>
+        <p:nvSpPr>
+          <p:cNvPr id="3" name="Title">
+            <a:extLst xmlns:a="http://schemas.openxmlformats.org/drawingml/2006/main">
+              <a:ext uri="{FF2B5EF4-FFF2-40B4-BE49-F238E27FC236}">
+                <a16:creationId xmlns:a16="http://schemas.microsoft.com/office/drawing/2014/main" id="{97426C30-A92A-48B3-A968-027429CEEDCA}"/>
+              </a:ext>
+            </a:extLst>
+          </p:cNvPr>
+          <p:cNvSpPr>
+            <a:spLocks xmlns:a="http://schemas.openxmlformats.org/drawingml/2006/main" noGrp="1"/>
+          </p:cNvSpPr>
+          <p:nvPr>
+            <p:ph type="title" idx="0"/>
+          </p:nvPr>
+        </p:nvSpPr>
+        <p:spPr>
+          <a:xfrm xmlns:a="http://schemas.openxmlformats.org/drawingml/2006/main">
+            <a:off x="685800" y="533400"/>
+            <a:ext cx="10820400" cy="838200"/>
+          </a:xfrm>
+          <a:prstGeom xmlns:a="http://schemas.openxmlformats.org/drawingml/2006/main" prst="rect">
+            <a:avLst/>
+          </a:prstGeom>
+          <a:noFill xmlns:a="http://schemas.openxmlformats.org/drawingml/2006/main"/>
+          <a:ln xmlns:a="http://schemas.openxmlformats.org/drawingml/2006/main">
+            <a:noFill/>
+            <a:prstDash val="solid"/>
+          </a:ln>
+        </p:spPr>
+        <p:txBody>
+          <a:bodyPr xmlns:a="http://schemas.openxmlformats.org/drawingml/2006/main" wrap="square" lIns="0" tIns="0" rIns="0" bIns="0" anchor="t">
+            <a:normAutofit/>
+          </a:bodyPr>
+          <a:lstStyle xmlns:a="http://schemas.openxmlformats.org/drawingml/2006/main">
+            <a:defPPr algn="l">
+              <a:defRPr sz="3300" b="1">
+                <a:solidFill>
+                  <a:schemeClr val="tx1"/>
+                </a:solidFill>
+                <a:latin typeface="+mj-lt"/>
+                <a:ea typeface="+mj-lt"/>
+                <a:cs typeface="+mj-lt"/>
+              </a:defRPr>
+            </a:defPPr>
+            <a:lvl1pPr marL="0" indent="0">
+              <a:lnSpc>
+                <a:spcPct val="110000"/>
+              </a:lnSpc>
+              <a:spcBef>
+                <a:spcPts val="0"/>
+              </a:spcBef>
+              <a:spcAft>
+                <a:spcPts val="0"/>
+              </a:spcAft>
+              <a:buNone/>
+            </a:lvl1pPr>
+            <a:lvl2pPr marL="0" indent="0">
+              <a:lnSpc>
+                <a:spcPct val="110000"/>
+              </a:lnSpc>
+              <a:spcBef>
+                <a:spcPts val="0"/>
+              </a:spcBef>
+              <a:spcAft>
+                <a:spcPts val="0"/>
+              </a:spcAft>
+              <a:buNone/>
+            </a:lvl2pPr>
+            <a:lvl3pPr marL="0" indent="0">
+              <a:lnSpc>
+                <a:spcPct val="110000"/>
+              </a:lnSpc>
+              <a:spcBef>
+                <a:spcPts val="0"/>
+              </a:spcBef>
+              <a:spcAft>
+                <a:spcPts val="0"/>
+              </a:spcAft>
+              <a:buNone/>
+            </a:lvl3pPr>
+            <a:lvl4pPr marL="0" indent="0">
+              <a:lnSpc>
+                <a:spcPct val="110000"/>
+              </a:lnSpc>
+              <a:spcBef>
+                <a:spcPts val="0"/>
+              </a:spcBef>
+              <a:spcAft>
+                <a:spcPts val="0"/>
+              </a:spcAft>
+              <a:buNone/>
+            </a:lvl4pPr>
+            <a:lvl5pPr marL="0" indent="0">
+              <a:lnSpc>
+                <a:spcPct val="110000"/>
+              </a:lnSpc>
+              <a:spcBef>
+                <a:spcPts val="0"/>
+              </a:spcBef>
+              <a:spcAft>
+                <a:spcPts val="0"/>
+              </a:spcAft>
+              <a:buNone/>
+            </a:lvl5pPr>
+            <a:lvl6pPr marL="0" indent="0">
+              <a:lnSpc>
+                <a:spcPct val="110000"/>
+              </a:lnSpc>
+              <a:spcBef>
+                <a:spcPts val="0"/>
+              </a:spcBef>
+              <a:spcAft>
+                <a:spcPts val="0"/>
+              </a:spcAft>
+              <a:buNone/>
+            </a:lvl6pPr>
+            <a:lvl7pPr marL="0" indent="0">
+              <a:lnSpc>
+                <a:spcPct val="110000"/>
+              </a:lnSpc>
+              <a:spcBef>
+                <a:spcPts val="0"/>
+              </a:spcBef>
+              <a:spcAft>
+                <a:spcPts val="0"/>
+              </a:spcAft>
+              <a:buNone/>
+            </a:lvl7pPr>
+            <a:lvl8pPr marL="0" indent="0">
+              <a:lnSpc>
+                <a:spcPct val="110000"/>
+              </a:lnSpc>
+              <a:spcBef>
+                <a:spcPts val="0"/>
+              </a:spcBef>
+              <a:spcAft>
+                <a:spcPts val="0"/>
+              </a:spcAft>
+              <a:buNone/>
+            </a:lvl8pPr>
+            <a:lvl9pPr marL="0" indent="0">
+              <a:lnSpc>
+                <a:spcPct val="110000"/>
+              </a:lnSpc>
+              <a:spcBef>
+                <a:spcPts val="0"/>
+              </a:spcBef>
+              <a:spcAft>
+                <a:spcPts val="0"/>
+              </a:spcAft>
+              <a:buNone/>
+            </a:lvl9pPr>
+          </a:lstStyle>
+          <a:p xmlns:a="http://schemas.openxmlformats.org/drawingml/2006/main"/>
+        </p:txBody>
+      </p:sp>
+      <p:sp>
+        <p:nvSpPr>
+          <p:cNvPr id="2" name="Left column">
+            <a:extLst xmlns:a="http://schemas.openxmlformats.org/drawingml/2006/main">
+              <a:ext uri="{FF2B5EF4-FFF2-40B4-BE49-F238E27FC236}">
+                <a16:creationId xmlns:a16="http://schemas.microsoft.com/office/drawing/2014/main" id="{8AD433E0-14B5-401A-A82C-E648B5B63290}"/>
+              </a:ext>
+            </a:extLst>
+          </p:cNvPr>
+          <p:cNvSpPr>
+            <a:spLocks xmlns:a="http://schemas.openxmlformats.org/drawingml/2006/main" noGrp="1"/>
+          </p:cNvSpPr>
+          <p:nvPr>
+            <p:ph type="body" idx="1"/>
+          </p:nvPr>
+        </p:nvSpPr>
+        <p:spPr>
+          <a:xfrm xmlns:a="http://schemas.openxmlformats.org/drawingml/2006/main">
+            <a:off x="685800" y="1905000"/>
+            <a:ext cx="5029200" cy="4267200"/>
+          </a:xfrm>
+          <a:prstGeom xmlns:a="http://schemas.openxmlformats.org/drawingml/2006/main" prst="rect">
+            <a:avLst/>
+          </a:prstGeom>
+          <a:noFill xmlns:a="http://schemas.openxmlformats.org/drawingml/2006/main"/>
+          <a:ln xmlns:a="http://schemas.openxmlformats.org/drawingml/2006/main">
+            <a:noFill/>
+            <a:prstDash val="solid"/>
+          </a:ln>
+        </p:spPr>
+        <p:txBody>
+          <a:bodyPr xmlns:a="http://schemas.openxmlformats.org/drawingml/2006/main" wrap="square" lIns="0" tIns="0" rIns="0" bIns="0" anchor="t">
+            <a:normAutofit/>
+          </a:bodyPr>
+          <a:lstStyle xmlns:a="http://schemas.openxmlformats.org/drawingml/2006/main">
+            <a:defPPr algn="l">
+              <a:defRPr sz="2250" b="0">
+                <a:solidFill>
+                  <a:schemeClr val="tx1"/>
+                </a:solidFill>
+                <a:latin typeface="+mn-lt"/>
+                <a:ea typeface="+mn-lt"/>
+                <a:cs typeface="+mn-lt"/>
+              </a:defRPr>
+            </a:defPPr>
+            <a:lvl1pPr marL="228600" indent="-228600">
+              <a:lnSpc>
+                <a:spcPct val="110000"/>
+              </a:lnSpc>
+              <a:spcBef>
+                <a:spcPts val="0"/>
+              </a:spcBef>
+              <a:spcAft>
+                <a:spcPts val="1200"/>
+              </a:spcAft>
+              <a:buChar char="•"/>
+            </a:lvl1pPr>
+            <a:lvl2pPr marL="533400" indent="-228600">
+              <a:lnSpc>
+                <a:spcPct val="110000"/>
+              </a:lnSpc>
+              <a:spcBef>
+                <a:spcPts val="0"/>
+              </a:spcBef>
+              <a:spcAft>
+                <a:spcPts val="1200"/>
+              </a:spcAft>
+              <a:buChar char="•"/>
+            </a:lvl2pPr>
+            <a:lvl3pPr marL="838200" indent="-228600">
+              <a:lnSpc>
+                <a:spcPct val="110000"/>
+              </a:lnSpc>
+              <a:spcBef>
+                <a:spcPts val="0"/>
+              </a:spcBef>
+              <a:spcAft>
+                <a:spcPts val="1200"/>
+              </a:spcAft>
+              <a:buChar char="•"/>
+            </a:lvl3pPr>
+            <a:lvl4pPr marL="1143000" indent="-228600">
+              <a:lnSpc>
+                <a:spcPct val="110000"/>
+              </a:lnSpc>
+              <a:spcBef>
+                <a:spcPts val="0"/>
+              </a:spcBef>
+              <a:spcAft>
+                <a:spcPts val="1200"/>
+              </a:spcAft>
+              <a:buChar char="•"/>
+            </a:lvl4pPr>
+            <a:lvl5pPr marL="1447800" indent="-228600">
+              <a:lnSpc>
+                <a:spcPct val="110000"/>
+              </a:lnSpc>
+              <a:spcBef>
+                <a:spcPts val="0"/>
+              </a:spcBef>
+              <a:spcAft>
+                <a:spcPts val="1200"/>
+              </a:spcAft>
+              <a:buChar char="•"/>
+            </a:lvl5pPr>
+            <a:lvl6pPr marL="1752600" indent="-228600">
+              <a:lnSpc>
+                <a:spcPct val="110000"/>
+              </a:lnSpc>
+              <a:spcBef>
+                <a:spcPts val="0"/>
+              </a:spcBef>
+              <a:spcAft>
+                <a:spcPts val="1200"/>
+              </a:spcAft>
+              <a:buChar char="•"/>
+            </a:lvl6pPr>
+            <a:lvl7pPr marL="2057400" indent="-228600">
+              <a:lnSpc>
+                <a:spcPct val="110000"/>
+              </a:lnSpc>
+              <a:spcBef>
+                <a:spcPts val="0"/>
+              </a:spcBef>
+              <a:spcAft>
+                <a:spcPts val="1200"/>
+              </a:spcAft>
+              <a:buChar char="•"/>
+            </a:lvl7pPr>
+            <a:lvl8pPr marL="2362200" indent="-228600">
+              <a:lnSpc>
+                <a:spcPct val="110000"/>
+              </a:lnSpc>
+              <a:spcBef>
+                <a:spcPts val="0"/>
+              </a:spcBef>
+              <a:spcAft>
+                <a:spcPts val="1200"/>
+              </a:spcAft>
+              <a:buChar char="•"/>
+            </a:lvl8pPr>
+            <a:lvl9pPr marL="2667000" indent="-228600">
+              <a:lnSpc>
+                <a:spcPct val="110000"/>
+              </a:lnSpc>
+              <a:spcBef>
+                <a:spcPts val="0"/>
+              </a:spcBef>
+              <a:spcAft>
+                <a:spcPts val="1200"/>
+              </a:spcAft>
+              <a:buChar char="•"/>
+            </a:lvl9pPr>
+          </a:lstStyle>
+          <a:p xmlns:a="http://schemas.openxmlformats.org/drawingml/2006/main"/>
+        </p:txBody>
+      </p:sp>
+    </p:spTree>
+  </p:cSld>
+</p:sldLayout>
+</file>
+
+<file path=ppt/slideLayouts/slideLayout6.xml><?xml version="1.0" encoding="utf-8"?>
+<p:sldLayout xmlns:p="http://schemas.openxmlformats.org/presentationml/2006/main" type="blank">
+  <p:cSld name="Blank">
+    <p:spTree>
+      <p:nvGrpSpPr>
+        <p:cNvPr id="1" name=""/>
+        <p:cNvGrpSpPr/>
+        <p:nvPr/>
+      </p:nvGrpSpPr>
+      <p:grpSpPr>
+        <a:xfrm xmlns:a="http://schemas.openxmlformats.org/drawingml/2006/main"/>
+      </p:grpSpPr>
     </p:spTree>
   </p:cSld>
 </p:sldLayout>
@@ -895,7 +2550,12 @@
   </p:cSld>
   <p:clrMap bg1="lt1" tx1="dk1" bg2="lt2" tx2="dk2" accent1="accent1" accent2="accent2" accent3="accent3" accent4="accent4" accent5="accent5" accent6="accent6" hlink="hlink" folHlink="folHlink"/>
   <p:sldLayoutIdLst>
-    <p:sldLayoutId xmlns:r="http://schemas.openxmlformats.org/officeDocument/2006/relationships" id="2147483649" r:id="Rfec161eed73a4ec5"/>
+    <p:sldLayoutId xmlns:r="http://schemas.openxmlformats.org/officeDocument/2006/relationships" id="2147483649" r:id="Rfd4d59556d384941"/>
+    <p:sldLayoutId xmlns:r="http://schemas.openxmlformats.org/officeDocument/2006/relationships" id="2147483650" r:id="R100627f5a5964273"/>
+    <p:sldLayoutId xmlns:r="http://schemas.openxmlformats.org/officeDocument/2006/relationships" id="2147483651" r:id="R236e0b9f88cc45ba"/>
+    <p:sldLayoutId xmlns:r="http://schemas.openxmlformats.org/officeDocument/2006/relationships" id="2147483652" r:id="R691e0000fe544995"/>
+    <p:sldLayoutId xmlns:r="http://schemas.openxmlformats.org/officeDocument/2006/relationships" id="2147483653" r:id="R863e7ba640c64c96"/>
+    <p:sldLayoutId xmlns:r="http://schemas.openxmlformats.org/officeDocument/2006/relationships" id="2147483654" r:id="R2026dc12105448af"/>
   </p:sldLayoutIdLst>
   <p:txStyles>
     <p:titleStyle>
@@ -1218,16 +2878,16 @@
         <a:srgbClr val="96607D"/>
       </a:folHlink>
     </a:clrScheme>
-    <a:fontScheme name="Office">
+    <a:fontScheme name="">
       <a:majorFont>
-        <a:latin typeface="Calibri Light"/>
-        <a:ea typeface="Calibri Light"/>
-        <a:cs typeface="Calibri Light"/>
+        <a:latin typeface="Aptos"/>
+        <a:ea typeface=""/>
+        <a:cs typeface=""/>
       </a:majorFont>
       <a:minorFont>
-        <a:latin typeface="Calibri"/>
-        <a:ea typeface="Calibri"/>
-        <a:cs typeface="Calibri"/>
+        <a:latin typeface="Aptos"/>
+        <a:ea typeface=""/>
+        <a:cs typeface=""/>
       </a:minorFont>
     </a:fontScheme>
     <a:fmtScheme name="ChatGPT">
@@ -1446,7 +3106,7 @@
           <p:cNvPr id="5" name="">
             <a:extLst xmlns:a="http://schemas.openxmlformats.org/drawingml/2006/main">
               <a:ext uri="{FF2B5EF4-FFF2-40B4-BE49-F238E27FC236}">
-                <a16:creationId xmlns:a16="http://schemas.microsoft.com/office/drawing/2014/main" id="{86536F14-E535-4D2E-9F67-62F40F12A9DE}"/>
+                <a16:creationId xmlns:a16="http://schemas.microsoft.com/office/drawing/2014/main" id="{F2CA0572-4ED5-4A5C-8B9D-8FEF17363AD8}"/>
               </a:ext>
             </a:extLst>
           </p:cNvPr>
@@ -1472,7 +3132,18 @@
           <a:bodyPr xmlns:a="http://schemas.openxmlformats.org/drawingml/2006/main" anchor="ctr">
             <a:noAutofit/>
           </a:bodyPr>
-          <a:lstStyle xmlns:a="http://schemas.openxmlformats.org/drawingml/2006/main"/>
+          <a:lstStyle xmlns:a="http://schemas.openxmlformats.org/drawingml/2006/main">
+            <a:defPPr algn="l">
+              <a:defRPr sz="2700" b="1">
+                <a:solidFill>
+                  <a:srgbClr val="161616"/>
+                </a:solidFill>
+                <a:latin typeface="Arial"/>
+                <a:ea typeface="Arial"/>
+                <a:cs typeface="Arial"/>
+              </a:defRPr>
+            </a:defPPr>
+          </a:lstStyle>
           <a:p xmlns:a="http://schemas.openxmlformats.org/drawingml/2006/main">
             <a:pPr algn="l">
               <a:defRPr sz="2700" b="1">
@@ -1503,7 +3174,7 @@
           <p:cNvPr id="2" name="">
             <a:extLst xmlns:a="http://schemas.openxmlformats.org/drawingml/2006/main">
               <a:ext uri="{FF2B5EF4-FFF2-40B4-BE49-F238E27FC236}">
-                <a16:creationId xmlns:a16="http://schemas.microsoft.com/office/drawing/2014/main" id="{56D59CAB-8E71-4324-8957-EB5BF632A4F5}"/>
+                <a16:creationId xmlns:a16="http://schemas.microsoft.com/office/drawing/2014/main" id="{2072686C-9F1C-4C22-8C0A-0726DAEF947B}"/>
               </a:ext>
             </a:extLst>
           </p:cNvPr>
@@ -1529,7 +3200,18 @@
           <a:bodyPr xmlns:a="http://schemas.openxmlformats.org/drawingml/2006/main">
             <a:noAutofit/>
           </a:bodyPr>
-          <a:lstStyle xmlns:a="http://schemas.openxmlformats.org/drawingml/2006/main"/>
+          <a:lstStyle xmlns:a="http://schemas.openxmlformats.org/drawingml/2006/main">
+            <a:defPPr>
+              <a:defRPr sz="3750" b="1">
+                <a:solidFill>
+                  <a:srgbClr val="161616"/>
+                </a:solidFill>
+                <a:latin typeface="Arial"/>
+                <a:ea typeface="Arial"/>
+                <a:cs typeface="Arial"/>
+              </a:defRPr>
+            </a:defPPr>
+          </a:lstStyle>
           <a:p xmlns:a="http://schemas.openxmlformats.org/drawingml/2006/main">
             <a:pPr>
               <a:defRPr sz="3750" b="1">
@@ -1560,7 +3242,7 @@
           <p:cNvPr id="3" name="">
             <a:extLst xmlns:a="http://schemas.openxmlformats.org/drawingml/2006/main">
               <a:ext uri="{FF2B5EF4-FFF2-40B4-BE49-F238E27FC236}">
-                <a16:creationId xmlns:a16="http://schemas.microsoft.com/office/drawing/2014/main" id="{CF007E15-CD4D-40FF-9846-BF9AB4A7DDCC}"/>
+                <a16:creationId xmlns:a16="http://schemas.microsoft.com/office/drawing/2014/main" id="{C3E04544-852F-4A2D-9958-F74676FB6D5E}"/>
               </a:ext>
             </a:extLst>
           </p:cNvPr>
@@ -1586,7 +3268,18 @@
           <a:bodyPr xmlns:a="http://schemas.openxmlformats.org/drawingml/2006/main">
             <a:noAutofit/>
           </a:bodyPr>
-          <a:lstStyle xmlns:a="http://schemas.openxmlformats.org/drawingml/2006/main"/>
+          <a:lstStyle xmlns:a="http://schemas.openxmlformats.org/drawingml/2006/main">
+            <a:defPPr>
+              <a:defRPr sz="2250" b="0">
+                <a:solidFill>
+                  <a:srgbClr val="161616"/>
+                </a:solidFill>
+                <a:latin typeface="Arial"/>
+                <a:ea typeface="Arial"/>
+                <a:cs typeface="Arial"/>
+              </a:defRPr>
+            </a:defPPr>
+          </a:lstStyle>
           <a:p xmlns:a="http://schemas.openxmlformats.org/drawingml/2006/main">
             <a:pPr>
               <a:defRPr sz="2250" b="0">
@@ -1617,7 +3310,7 @@
           <p:cNvPr id="4" name="">
             <a:extLst xmlns:a="http://schemas.openxmlformats.org/drawingml/2006/main">
               <a:ext uri="{FF2B5EF4-FFF2-40B4-BE49-F238E27FC236}">
-                <a16:creationId xmlns:a16="http://schemas.microsoft.com/office/drawing/2014/main" id="{25443574-CE15-45C5-A8DE-29AE593E5BA9}"/>
+                <a16:creationId xmlns:a16="http://schemas.microsoft.com/office/drawing/2014/main" id="{E66A801D-C2D5-493C-A9F4-5110F90D03CF}"/>
               </a:ext>
             </a:extLst>
           </p:cNvPr>
@@ -1643,7 +3336,18 @@
           <a:bodyPr xmlns:a="http://schemas.openxmlformats.org/drawingml/2006/main">
             <a:noAutofit/>
           </a:bodyPr>
-          <a:lstStyle xmlns:a="http://schemas.openxmlformats.org/drawingml/2006/main"/>
+          <a:lstStyle xmlns:a="http://schemas.openxmlformats.org/drawingml/2006/main">
+            <a:defPPr>
+              <a:defRPr sz="1800" b="0">
+                <a:solidFill>
+                  <a:srgbClr val="161616"/>
+                </a:solidFill>
+                <a:latin typeface="Arial"/>
+                <a:ea typeface="Arial"/>
+                <a:cs typeface="Arial"/>
+              </a:defRPr>
+            </a:defPPr>
+          </a:lstStyle>
           <a:p xmlns:a="http://schemas.openxmlformats.org/drawingml/2006/main">
             <a:pPr>
               <a:defRPr sz="1800" b="0">
@@ -1695,7 +3399,7 @@
     </p:spTree>
     <p:extLst>
       <p:ext uri="{BB962C8B-B14F-4D97-AF65-F5344CB8AC3E}">
-        <p14:creationId xmlns:p14="http://schemas.microsoft.com/office/powerpoint/2010/main" val="1128499954"/>
+        <p14:creationId xmlns:p14="http://schemas.microsoft.com/office/powerpoint/2010/main" val="564480164"/>
       </p:ext>
     </p:extLst>
   </p:cSld>
@@ -1726,7 +3430,7 @@
           <p:cNvPr id="3" name="">
             <a:extLst xmlns:a="http://schemas.openxmlformats.org/drawingml/2006/main">
               <a:ext uri="{FF2B5EF4-FFF2-40B4-BE49-F238E27FC236}">
-                <a16:creationId xmlns:a16="http://schemas.microsoft.com/office/drawing/2014/main" id="{B3A1C9C9-6F92-45CB-959E-7057E18A0F13}"/>
+                <a16:creationId xmlns:a16="http://schemas.microsoft.com/office/drawing/2014/main" id="{94C2CB39-75E6-4CF4-ADA0-4E5532763F73}"/>
               </a:ext>
             </a:extLst>
           </p:cNvPr>
@@ -1752,7 +3456,18 @@
           <a:bodyPr xmlns:a="http://schemas.openxmlformats.org/drawingml/2006/main" anchor="ctr">
             <a:noAutofit/>
           </a:bodyPr>
-          <a:lstStyle xmlns:a="http://schemas.openxmlformats.org/drawingml/2006/main"/>
+          <a:lstStyle xmlns:a="http://schemas.openxmlformats.org/drawingml/2006/main">
+            <a:defPPr algn="l">
+              <a:defRPr sz="2700" b="1">
+                <a:solidFill>
+                  <a:srgbClr val="161616"/>
+                </a:solidFill>
+                <a:latin typeface="Arial"/>
+                <a:ea typeface="Arial"/>
+                <a:cs typeface="Arial"/>
+              </a:defRPr>
+            </a:defPPr>
+          </a:lstStyle>
           <a:p xmlns:a="http://schemas.openxmlformats.org/drawingml/2006/main">
             <a:pPr algn="l">
               <a:defRPr sz="2700" b="1">
@@ -1780,14 +3495,20 @@
       </p:sp>
       <p:pic>
         <p:nvPicPr>
-          <p:cNvPr id="4" name=""/>
+          <p:cNvPr id="2" name="">
+            <a:extLst xmlns:a="http://schemas.openxmlformats.org/drawingml/2006/main">
+              <a:ext uri="{FF2B5EF4-FFF2-40B4-BE49-F238E27FC236}">
+                <a16:creationId xmlns:a16="http://schemas.microsoft.com/office/drawing/2014/main" id="{BFF5241B-12FE-4CD2-AD83-D21E97C312DD}"/>
+              </a:ext>
+            </a:extLst>
+          </p:cNvPr>
           <p:cNvPicPr>
             <a:picLocks xmlns:a="http://schemas.openxmlformats.org/drawingml/2006/main" noChangeAspect="1"/>
           </p:cNvPicPr>
           <p:nvPr/>
         </p:nvPicPr>
         <p:blipFill>
-          <a:blip xmlns:r="http://schemas.openxmlformats.org/officeDocument/2006/relationships" xmlns:a="http://schemas.openxmlformats.org/drawingml/2006/main" r:embed="R1c38e210962a4a59"/>
+          <a:blip xmlns:r="http://schemas.openxmlformats.org/officeDocument/2006/relationships" xmlns:a="http://schemas.openxmlformats.org/drawingml/2006/main" r:embed="R2f7f058d926f49b4"/>
           <a:stretch xmlns:a="http://schemas.openxmlformats.org/drawingml/2006/main"/>
         </p:blipFill>
         <p:spPr>
@@ -1803,7 +3524,7 @@
     </p:spTree>
     <p:extLst>
       <p:ext uri="{BB962C8B-B14F-4D97-AF65-F5344CB8AC3E}">
-        <p14:creationId xmlns:p14="http://schemas.microsoft.com/office/powerpoint/2010/main" val="609433388"/>
+        <p14:creationId xmlns:p14="http://schemas.microsoft.com/office/powerpoint/2010/main" val="1012626795"/>
       </p:ext>
     </p:extLst>
   </p:cSld>
@@ -1834,7 +3555,7 @@
           <p:cNvPr id="3" name="">
             <a:extLst xmlns:a="http://schemas.openxmlformats.org/drawingml/2006/main">
               <a:ext uri="{FF2B5EF4-FFF2-40B4-BE49-F238E27FC236}">
-                <a16:creationId xmlns:a16="http://schemas.microsoft.com/office/drawing/2014/main" id="{1ACBDB66-D8FD-4E1B-A14B-B38219EFFB2E}"/>
+                <a16:creationId xmlns:a16="http://schemas.microsoft.com/office/drawing/2014/main" id="{CE476258-D6DD-4DF9-9E1C-0C0D1E029662}"/>
               </a:ext>
             </a:extLst>
           </p:cNvPr>
@@ -1860,7 +3581,18 @@
           <a:bodyPr xmlns:a="http://schemas.openxmlformats.org/drawingml/2006/main" anchor="ctr">
             <a:noAutofit/>
           </a:bodyPr>
-          <a:lstStyle xmlns:a="http://schemas.openxmlformats.org/drawingml/2006/main"/>
+          <a:lstStyle xmlns:a="http://schemas.openxmlformats.org/drawingml/2006/main">
+            <a:defPPr algn="l">
+              <a:defRPr sz="2700" b="1">
+                <a:solidFill>
+                  <a:srgbClr val="161616"/>
+                </a:solidFill>
+                <a:latin typeface="Arial"/>
+                <a:ea typeface="Arial"/>
+                <a:cs typeface="Arial"/>
+              </a:defRPr>
+            </a:defPPr>
+          </a:lstStyle>
           <a:p xmlns:a="http://schemas.openxmlformats.org/drawingml/2006/main">
             <a:pPr algn="l">
               <a:defRPr sz="2700" b="1">
@@ -1888,14 +3620,20 @@
       </p:sp>
       <p:pic>
         <p:nvPicPr>
-          <p:cNvPr id="4" name=""/>
+          <p:cNvPr id="2" name="">
+            <a:extLst xmlns:a="http://schemas.openxmlformats.org/drawingml/2006/main">
+              <a:ext uri="{FF2B5EF4-FFF2-40B4-BE49-F238E27FC236}">
+                <a16:creationId xmlns:a16="http://schemas.microsoft.com/office/drawing/2014/main" id="{2BFFC9CC-110A-4160-B870-3E9A35338C35}"/>
+              </a:ext>
+            </a:extLst>
+          </p:cNvPr>
           <p:cNvPicPr>
             <a:picLocks xmlns:a="http://schemas.openxmlformats.org/drawingml/2006/main" noChangeAspect="1"/>
           </p:cNvPicPr>
           <p:nvPr/>
         </p:nvPicPr>
         <p:blipFill>
-          <a:blip xmlns:r="http://schemas.openxmlformats.org/officeDocument/2006/relationships" xmlns:a="http://schemas.openxmlformats.org/drawingml/2006/main" r:embed="R134a8cd279134587"/>
+          <a:blip xmlns:r="http://schemas.openxmlformats.org/officeDocument/2006/relationships" xmlns:a="http://schemas.openxmlformats.org/drawingml/2006/main" r:embed="Ra157b381a51b42d9"/>
           <a:stretch xmlns:a="http://schemas.openxmlformats.org/drawingml/2006/main"/>
         </p:blipFill>
         <p:spPr>
@@ -1911,7 +3649,7 @@
     </p:spTree>
     <p:extLst>
       <p:ext uri="{BB962C8B-B14F-4D97-AF65-F5344CB8AC3E}">
-        <p14:creationId xmlns:p14="http://schemas.microsoft.com/office/powerpoint/2010/main" val="2112987444"/>
+        <p14:creationId xmlns:p14="http://schemas.microsoft.com/office/powerpoint/2010/main" val="1086520761"/>
       </p:ext>
     </p:extLst>
   </p:cSld>
@@ -1942,7 +3680,7 @@
           <p:cNvPr id="3" name="">
             <a:extLst xmlns:a="http://schemas.openxmlformats.org/drawingml/2006/main">
               <a:ext uri="{FF2B5EF4-FFF2-40B4-BE49-F238E27FC236}">
-                <a16:creationId xmlns:a16="http://schemas.microsoft.com/office/drawing/2014/main" id="{6D096BCB-E359-4884-AD9F-64AAAB65669C}"/>
+                <a16:creationId xmlns:a16="http://schemas.microsoft.com/office/drawing/2014/main" id="{349C1D64-3A80-4513-8137-DE67F4317103}"/>
               </a:ext>
             </a:extLst>
           </p:cNvPr>
@@ -1968,7 +3706,18 @@
           <a:bodyPr xmlns:a="http://schemas.openxmlformats.org/drawingml/2006/main" anchor="ctr">
             <a:noAutofit/>
           </a:bodyPr>
-          <a:lstStyle xmlns:a="http://schemas.openxmlformats.org/drawingml/2006/main"/>
+          <a:lstStyle xmlns:a="http://schemas.openxmlformats.org/drawingml/2006/main">
+            <a:defPPr algn="l">
+              <a:defRPr sz="2700" b="1">
+                <a:solidFill>
+                  <a:srgbClr val="161616"/>
+                </a:solidFill>
+                <a:latin typeface="Arial"/>
+                <a:ea typeface="Arial"/>
+                <a:cs typeface="Arial"/>
+              </a:defRPr>
+            </a:defPPr>
+          </a:lstStyle>
           <a:p xmlns:a="http://schemas.openxmlformats.org/drawingml/2006/main">
             <a:pPr algn="l">
               <a:defRPr sz="2700" b="1">
@@ -1996,14 +3745,20 @@
       </p:sp>
       <p:pic>
         <p:nvPicPr>
-          <p:cNvPr id="4" name=""/>
+          <p:cNvPr id="2" name="">
+            <a:extLst xmlns:a="http://schemas.openxmlformats.org/drawingml/2006/main">
+              <a:ext uri="{FF2B5EF4-FFF2-40B4-BE49-F238E27FC236}">
+                <a16:creationId xmlns:a16="http://schemas.microsoft.com/office/drawing/2014/main" id="{6587AE75-332E-42C2-AE77-6CBBA17179BA}"/>
+              </a:ext>
+            </a:extLst>
+          </p:cNvPr>
           <p:cNvPicPr>
             <a:picLocks xmlns:a="http://schemas.openxmlformats.org/drawingml/2006/main" noChangeAspect="1"/>
           </p:cNvPicPr>
           <p:nvPr/>
         </p:nvPicPr>
         <p:blipFill>
-          <a:blip xmlns:r="http://schemas.openxmlformats.org/officeDocument/2006/relationships" xmlns:a="http://schemas.openxmlformats.org/drawingml/2006/main" r:embed="R239350d2a9174fe3"/>
+          <a:blip xmlns:r="http://schemas.openxmlformats.org/officeDocument/2006/relationships" xmlns:a="http://schemas.openxmlformats.org/drawingml/2006/main" r:embed="R260b356944fa4d10"/>
           <a:stretch xmlns:a="http://schemas.openxmlformats.org/drawingml/2006/main"/>
         </p:blipFill>
         <p:spPr>
@@ -2019,7 +3774,7 @@
     </p:spTree>
     <p:extLst>
       <p:ext uri="{BB962C8B-B14F-4D97-AF65-F5344CB8AC3E}">
-        <p14:creationId xmlns:p14="http://schemas.microsoft.com/office/powerpoint/2010/main" val="1643715439"/>
+        <p14:creationId xmlns:p14="http://schemas.microsoft.com/office/powerpoint/2010/main" val="1604021317"/>
       </p:ext>
     </p:extLst>
   </p:cSld>
@@ -2050,7 +3805,7 @@
           <p:cNvPr id="10" name="">
             <a:extLst xmlns:a="http://schemas.openxmlformats.org/drawingml/2006/main">
               <a:ext uri="{FF2B5EF4-FFF2-40B4-BE49-F238E27FC236}">
-                <a16:creationId xmlns:a16="http://schemas.microsoft.com/office/drawing/2014/main" id="{6E159DE4-AF0B-4F6D-8696-D3BD3847FD47}"/>
+                <a16:creationId xmlns:a16="http://schemas.microsoft.com/office/drawing/2014/main" id="{2E5BA792-35BA-42A7-ACBF-9D1F4FA8C67B}"/>
               </a:ext>
             </a:extLst>
           </p:cNvPr>
@@ -2076,7 +3831,18 @@
           <a:bodyPr xmlns:a="http://schemas.openxmlformats.org/drawingml/2006/main" anchor="ctr">
             <a:noAutofit/>
           </a:bodyPr>
-          <a:lstStyle xmlns:a="http://schemas.openxmlformats.org/drawingml/2006/main"/>
+          <a:lstStyle xmlns:a="http://schemas.openxmlformats.org/drawingml/2006/main">
+            <a:defPPr algn="l">
+              <a:defRPr sz="2700" b="1">
+                <a:solidFill>
+                  <a:srgbClr val="161616"/>
+                </a:solidFill>
+                <a:latin typeface="Arial"/>
+                <a:ea typeface="Arial"/>
+                <a:cs typeface="Arial"/>
+              </a:defRPr>
+            </a:defPPr>
+          </a:lstStyle>
           <a:p xmlns:a="http://schemas.openxmlformats.org/drawingml/2006/main">
             <a:pPr algn="l">
               <a:defRPr sz="2700" b="1">
@@ -2107,7 +3873,7 @@
           <p:cNvPr id="2" name="">
             <a:extLst xmlns:a="http://schemas.openxmlformats.org/drawingml/2006/main">
               <a:ext uri="{FF2B5EF4-FFF2-40B4-BE49-F238E27FC236}">
-                <a16:creationId xmlns:a16="http://schemas.microsoft.com/office/drawing/2014/main" id="{DF2EB3F3-40E2-419D-BD83-D571E4C1EDDB}"/>
+                <a16:creationId xmlns:a16="http://schemas.microsoft.com/office/drawing/2014/main" id="{A5D048C2-B870-42E0-BFA2-5B5E21701480}"/>
               </a:ext>
             </a:extLst>
           </p:cNvPr>
@@ -2137,7 +3903,18 @@
         </p:spPr>
         <p:txBody>
           <a:bodyPr xmlns:a="http://schemas.openxmlformats.org/drawingml/2006/main" anchor="ctr"/>
-          <a:lstStyle xmlns:a="http://schemas.openxmlformats.org/drawingml/2006/main"/>
+          <a:lstStyle xmlns:a="http://schemas.openxmlformats.org/drawingml/2006/main">
+            <a:defPPr algn="ctr">
+              <a:defRPr sz="1875">
+                <a:solidFill>
+                  <a:srgbClr val="111111"/>
+                </a:solidFill>
+                <a:latin typeface="Arial"/>
+                <a:ea typeface="Arial"/>
+                <a:cs typeface="Arial"/>
+              </a:defRPr>
+            </a:defPPr>
+          </a:lstStyle>
           <a:p xmlns:a="http://schemas.openxmlformats.org/drawingml/2006/main">
             <a:pPr algn="ctr">
               <a:defRPr sz="1875">
@@ -2191,7 +3968,7 @@
           <p:cNvPr id="3" name="">
             <a:extLst xmlns:a="http://schemas.openxmlformats.org/drawingml/2006/main">
               <a:ext uri="{FF2B5EF4-FFF2-40B4-BE49-F238E27FC236}">
-                <a16:creationId xmlns:a16="http://schemas.microsoft.com/office/drawing/2014/main" id="{6F04E048-36E2-4059-A666-08BC382F3C52}"/>
+                <a16:creationId xmlns:a16="http://schemas.microsoft.com/office/drawing/2014/main" id="{9094FE96-48A3-4F6A-904A-B71807F81809}"/>
               </a:ext>
             </a:extLst>
           </p:cNvPr>
@@ -2221,7 +3998,7 @@
           <p:cNvPr id="4" name="">
             <a:extLst xmlns:a="http://schemas.openxmlformats.org/drawingml/2006/main">
               <a:ext uri="{FF2B5EF4-FFF2-40B4-BE49-F238E27FC236}">
-                <a16:creationId xmlns:a16="http://schemas.microsoft.com/office/drawing/2014/main" id="{7829B3B9-DDC5-4A23-BCF0-DAF8036669C8}"/>
+                <a16:creationId xmlns:a16="http://schemas.microsoft.com/office/drawing/2014/main" id="{E95697FF-AA65-4361-8699-9F76651FD198}"/>
               </a:ext>
             </a:extLst>
           </p:cNvPr>
@@ -2251,7 +4028,18 @@
         </p:spPr>
         <p:txBody>
           <a:bodyPr xmlns:a="http://schemas.openxmlformats.org/drawingml/2006/main" anchor="ctr"/>
-          <a:lstStyle xmlns:a="http://schemas.openxmlformats.org/drawingml/2006/main"/>
+          <a:lstStyle xmlns:a="http://schemas.openxmlformats.org/drawingml/2006/main">
+            <a:defPPr algn="ctr">
+              <a:defRPr sz="1875">
+                <a:solidFill>
+                  <a:srgbClr val="111111"/>
+                </a:solidFill>
+                <a:latin typeface="Arial"/>
+                <a:ea typeface="Arial"/>
+                <a:cs typeface="Arial"/>
+              </a:defRPr>
+            </a:defPPr>
+          </a:lstStyle>
           <a:p xmlns:a="http://schemas.openxmlformats.org/drawingml/2006/main">
             <a:pPr algn="ctr">
               <a:defRPr sz="1875">
@@ -2305,7 +4093,7 @@
           <p:cNvPr id="5" name="">
             <a:extLst xmlns:a="http://schemas.openxmlformats.org/drawingml/2006/main">
               <a:ext uri="{FF2B5EF4-FFF2-40B4-BE49-F238E27FC236}">
-                <a16:creationId xmlns:a16="http://schemas.microsoft.com/office/drawing/2014/main" id="{550120C7-DC95-4A5D-8290-99BD8F2B5791}"/>
+                <a16:creationId xmlns:a16="http://schemas.microsoft.com/office/drawing/2014/main" id="{D4B4736E-25F2-4838-AFC9-A48C344C4DF4}"/>
               </a:ext>
             </a:extLst>
           </p:cNvPr>
@@ -2335,7 +4123,7 @@
           <p:cNvPr id="6" name="">
             <a:extLst xmlns:a="http://schemas.openxmlformats.org/drawingml/2006/main">
               <a:ext uri="{FF2B5EF4-FFF2-40B4-BE49-F238E27FC236}">
-                <a16:creationId xmlns:a16="http://schemas.microsoft.com/office/drawing/2014/main" id="{392D2A88-F84A-49E8-926C-5E47B821EE19}"/>
+                <a16:creationId xmlns:a16="http://schemas.microsoft.com/office/drawing/2014/main" id="{69AF498D-E48A-498B-935D-5A095A48A342}"/>
               </a:ext>
             </a:extLst>
           </p:cNvPr>
@@ -2365,7 +4153,18 @@
         </p:spPr>
         <p:txBody>
           <a:bodyPr xmlns:a="http://schemas.openxmlformats.org/drawingml/2006/main" anchor="ctr"/>
-          <a:lstStyle xmlns:a="http://schemas.openxmlformats.org/drawingml/2006/main"/>
+          <a:lstStyle xmlns:a="http://schemas.openxmlformats.org/drawingml/2006/main">
+            <a:defPPr algn="ctr">
+              <a:defRPr sz="1875">
+                <a:solidFill>
+                  <a:srgbClr val="111111"/>
+                </a:solidFill>
+                <a:latin typeface="Arial"/>
+                <a:ea typeface="Arial"/>
+                <a:cs typeface="Arial"/>
+              </a:defRPr>
+            </a:defPPr>
+          </a:lstStyle>
           <a:p xmlns:a="http://schemas.openxmlformats.org/drawingml/2006/main">
             <a:pPr algn="ctr">
               <a:defRPr sz="1875">
@@ -2419,7 +4218,7 @@
           <p:cNvPr id="7" name="">
             <a:extLst xmlns:a="http://schemas.openxmlformats.org/drawingml/2006/main">
               <a:ext uri="{FF2B5EF4-FFF2-40B4-BE49-F238E27FC236}">
-                <a16:creationId xmlns:a16="http://schemas.microsoft.com/office/drawing/2014/main" id="{57BFB5FA-FE6B-4B18-81A2-B28BABFC392B}"/>
+                <a16:creationId xmlns:a16="http://schemas.microsoft.com/office/drawing/2014/main" id="{725FD59D-F4E0-4B2B-87D3-EE0CB76962D0}"/>
               </a:ext>
             </a:extLst>
           </p:cNvPr>
@@ -2449,7 +4248,7 @@
           <p:cNvPr id="8" name="">
             <a:extLst xmlns:a="http://schemas.openxmlformats.org/drawingml/2006/main">
               <a:ext uri="{FF2B5EF4-FFF2-40B4-BE49-F238E27FC236}">
-                <a16:creationId xmlns:a16="http://schemas.microsoft.com/office/drawing/2014/main" id="{E6E3D3EB-4B75-4FDA-94CB-EFA782C66C60}"/>
+                <a16:creationId xmlns:a16="http://schemas.microsoft.com/office/drawing/2014/main" id="{DA85B813-450E-423E-AC4C-1FD01F663526}"/>
               </a:ext>
             </a:extLst>
           </p:cNvPr>
@@ -2479,7 +4278,18 @@
         </p:spPr>
         <p:txBody>
           <a:bodyPr xmlns:a="http://schemas.openxmlformats.org/drawingml/2006/main" anchor="ctr"/>
-          <a:lstStyle xmlns:a="http://schemas.openxmlformats.org/drawingml/2006/main"/>
+          <a:lstStyle xmlns:a="http://schemas.openxmlformats.org/drawingml/2006/main">
+            <a:defPPr algn="ctr">
+              <a:defRPr sz="1875">
+                <a:solidFill>
+                  <a:srgbClr val="111111"/>
+                </a:solidFill>
+                <a:latin typeface="Arial"/>
+                <a:ea typeface="Arial"/>
+                <a:cs typeface="Arial"/>
+              </a:defRPr>
+            </a:defPPr>
+          </a:lstStyle>
           <a:p xmlns:a="http://schemas.openxmlformats.org/drawingml/2006/main">
             <a:pPr algn="ctr">
               <a:defRPr sz="1875">
@@ -2533,7 +4343,7 @@
           <p:cNvPr id="9" name="">
             <a:extLst xmlns:a="http://schemas.openxmlformats.org/drawingml/2006/main">
               <a:ext uri="{FF2B5EF4-FFF2-40B4-BE49-F238E27FC236}">
-                <a16:creationId xmlns:a16="http://schemas.microsoft.com/office/drawing/2014/main" id="{6F5E3A75-F792-479B-BBC4-3DBC7F2AC321}"/>
+                <a16:creationId xmlns:a16="http://schemas.microsoft.com/office/drawing/2014/main" id="{56522A05-5B9E-47B1-9DB2-55378E21C7F9}"/>
               </a:ext>
             </a:extLst>
           </p:cNvPr>
@@ -2559,7 +4369,18 @@
           <a:bodyPr xmlns:a="http://schemas.openxmlformats.org/drawingml/2006/main">
             <a:noAutofit/>
           </a:bodyPr>
-          <a:lstStyle xmlns:a="http://schemas.openxmlformats.org/drawingml/2006/main"/>
+          <a:lstStyle xmlns:a="http://schemas.openxmlformats.org/drawingml/2006/main">
+            <a:defPPr>
+              <a:defRPr sz="2175" b="0">
+                <a:solidFill>
+                  <a:srgbClr val="161616"/>
+                </a:solidFill>
+                <a:latin typeface="Arial"/>
+                <a:ea typeface="Arial"/>
+                <a:cs typeface="Arial"/>
+              </a:defRPr>
+            </a:defPPr>
+          </a:lstStyle>
           <a:p xmlns:a="http://schemas.openxmlformats.org/drawingml/2006/main">
             <a:pPr>
               <a:defRPr sz="2175" b="0">
@@ -2588,7 +4409,7 @@
     </p:spTree>
     <p:extLst>
       <p:ext uri="{BB962C8B-B14F-4D97-AF65-F5344CB8AC3E}">
-        <p14:creationId xmlns:p14="http://schemas.microsoft.com/office/powerpoint/2010/main" val="1258581933"/>
+        <p14:creationId xmlns:p14="http://schemas.microsoft.com/office/powerpoint/2010/main" val="892720724"/>
       </p:ext>
     </p:extLst>
   </p:cSld>
@@ -2619,7 +4440,7 @@
           <p:cNvPr id="6" name="">
             <a:extLst xmlns:a="http://schemas.openxmlformats.org/drawingml/2006/main">
               <a:ext uri="{FF2B5EF4-FFF2-40B4-BE49-F238E27FC236}">
-                <a16:creationId xmlns:a16="http://schemas.microsoft.com/office/drawing/2014/main" id="{CDC4A760-CD4C-4C13-A0D7-43FEA3A92203}"/>
+                <a16:creationId xmlns:a16="http://schemas.microsoft.com/office/drawing/2014/main" id="{3C61818C-ED62-4D28-B74B-86B0FC93845C}"/>
               </a:ext>
             </a:extLst>
           </p:cNvPr>
@@ -2645,7 +4466,18 @@
           <a:bodyPr xmlns:a="http://schemas.openxmlformats.org/drawingml/2006/main" anchor="ctr">
             <a:noAutofit/>
           </a:bodyPr>
-          <a:lstStyle xmlns:a="http://schemas.openxmlformats.org/drawingml/2006/main"/>
+          <a:lstStyle xmlns:a="http://schemas.openxmlformats.org/drawingml/2006/main">
+            <a:defPPr algn="l">
+              <a:defRPr sz="2700" b="1">
+                <a:solidFill>
+                  <a:srgbClr val="161616"/>
+                </a:solidFill>
+                <a:latin typeface="Arial"/>
+                <a:ea typeface="Arial"/>
+                <a:cs typeface="Arial"/>
+              </a:defRPr>
+            </a:defPPr>
+          </a:lstStyle>
           <a:p xmlns:a="http://schemas.openxmlformats.org/drawingml/2006/main">
             <a:pPr algn="l">
               <a:defRPr sz="2700" b="1">
@@ -2676,7 +4508,7 @@
           <p:cNvPr id="2" name="">
             <a:extLst xmlns:a="http://schemas.openxmlformats.org/drawingml/2006/main">
               <a:ext uri="{FF2B5EF4-FFF2-40B4-BE49-F238E27FC236}">
-                <a16:creationId xmlns:a16="http://schemas.microsoft.com/office/drawing/2014/main" id="{C0447D64-C337-4EFE-AB7C-9F67140A33F4}"/>
+                <a16:creationId xmlns:a16="http://schemas.microsoft.com/office/drawing/2014/main" id="{8134A983-F84E-4B51-8A26-23E803850A2F}"/>
               </a:ext>
             </a:extLst>
           </p:cNvPr>
@@ -2702,7 +4534,18 @@
           <a:bodyPr xmlns:a="http://schemas.openxmlformats.org/drawingml/2006/main">
             <a:noAutofit/>
           </a:bodyPr>
-          <a:lstStyle xmlns:a="http://schemas.openxmlformats.org/drawingml/2006/main"/>
+          <a:lstStyle xmlns:a="http://schemas.openxmlformats.org/drawingml/2006/main">
+            <a:defPPr>
+              <a:defRPr sz="2175" b="0">
+                <a:solidFill>
+                  <a:srgbClr val="161616"/>
+                </a:solidFill>
+                <a:latin typeface="Arial"/>
+                <a:ea typeface="Arial"/>
+                <a:cs typeface="Arial"/>
+              </a:defRPr>
+            </a:defPPr>
+          </a:lstStyle>
           <a:p xmlns:a="http://schemas.openxmlformats.org/drawingml/2006/main">
             <a:pPr>
               <a:defRPr sz="2175" b="0">
@@ -2733,7 +4576,7 @@
           <p:cNvPr id="3" name="">
             <a:extLst xmlns:a="http://schemas.openxmlformats.org/drawingml/2006/main">
               <a:ext uri="{FF2B5EF4-FFF2-40B4-BE49-F238E27FC236}">
-                <a16:creationId xmlns:a16="http://schemas.microsoft.com/office/drawing/2014/main" id="{5DC64EA2-7706-4661-A9CD-8EBD222650B0}"/>
+                <a16:creationId xmlns:a16="http://schemas.microsoft.com/office/drawing/2014/main" id="{8D0561D6-DB72-498D-8DA7-6CC6F478DED4}"/>
               </a:ext>
             </a:extLst>
           </p:cNvPr>
@@ -2759,7 +4602,18 @@
           <a:bodyPr xmlns:a="http://schemas.openxmlformats.org/drawingml/2006/main">
             <a:noAutofit/>
           </a:bodyPr>
-          <a:lstStyle xmlns:a="http://schemas.openxmlformats.org/drawingml/2006/main"/>
+          <a:lstStyle xmlns:a="http://schemas.openxmlformats.org/drawingml/2006/main">
+            <a:defPPr>
+              <a:defRPr sz="2175" b="0">
+                <a:solidFill>
+                  <a:srgbClr val="161616"/>
+                </a:solidFill>
+                <a:latin typeface="Arial"/>
+                <a:ea typeface="Arial"/>
+                <a:cs typeface="Arial"/>
+              </a:defRPr>
+            </a:defPPr>
+          </a:lstStyle>
           <a:p xmlns:a="http://schemas.openxmlformats.org/drawingml/2006/main">
             <a:pPr>
               <a:defRPr sz="2175" b="0">
@@ -2790,7 +4644,7 @@
           <p:cNvPr id="4" name="">
             <a:extLst xmlns:a="http://schemas.openxmlformats.org/drawingml/2006/main">
               <a:ext uri="{FF2B5EF4-FFF2-40B4-BE49-F238E27FC236}">
-                <a16:creationId xmlns:a16="http://schemas.microsoft.com/office/drawing/2014/main" id="{6B4C91A1-5782-4973-9C32-AEFBA651BD3F}"/>
+                <a16:creationId xmlns:a16="http://schemas.microsoft.com/office/drawing/2014/main" id="{64F31FB5-DF1F-40FB-B8D2-8F6F2659AE96}"/>
               </a:ext>
             </a:extLst>
           </p:cNvPr>
@@ -2816,7 +4670,18 @@
           <a:bodyPr xmlns:a="http://schemas.openxmlformats.org/drawingml/2006/main">
             <a:noAutofit/>
           </a:bodyPr>
-          <a:lstStyle xmlns:a="http://schemas.openxmlformats.org/drawingml/2006/main"/>
+          <a:lstStyle xmlns:a="http://schemas.openxmlformats.org/drawingml/2006/main">
+            <a:defPPr>
+              <a:defRPr sz="2175" b="0">
+                <a:solidFill>
+                  <a:srgbClr val="161616"/>
+                </a:solidFill>
+                <a:latin typeface="Arial"/>
+                <a:ea typeface="Arial"/>
+                <a:cs typeface="Arial"/>
+              </a:defRPr>
+            </a:defPPr>
+          </a:lstStyle>
           <a:p xmlns:a="http://schemas.openxmlformats.org/drawingml/2006/main">
             <a:pPr>
               <a:defRPr sz="2175" b="0">
@@ -2847,7 +4712,7 @@
           <p:cNvPr id="5" name="">
             <a:extLst xmlns:a="http://schemas.openxmlformats.org/drawingml/2006/main">
               <a:ext uri="{FF2B5EF4-FFF2-40B4-BE49-F238E27FC236}">
-                <a16:creationId xmlns:a16="http://schemas.microsoft.com/office/drawing/2014/main" id="{62DC307D-13AC-4AF9-988C-5C5CBF2CA188}"/>
+                <a16:creationId xmlns:a16="http://schemas.microsoft.com/office/drawing/2014/main" id="{3DD131FE-A524-40A3-B1CB-04ACA4D76B03}"/>
               </a:ext>
             </a:extLst>
           </p:cNvPr>
@@ -2873,7 +4738,18 @@
           <a:bodyPr xmlns:a="http://schemas.openxmlformats.org/drawingml/2006/main">
             <a:noAutofit/>
           </a:bodyPr>
-          <a:lstStyle xmlns:a="http://schemas.openxmlformats.org/drawingml/2006/main"/>
+          <a:lstStyle xmlns:a="http://schemas.openxmlformats.org/drawingml/2006/main">
+            <a:defPPr>
+              <a:defRPr sz="2175" b="0">
+                <a:solidFill>
+                  <a:srgbClr val="161616"/>
+                </a:solidFill>
+                <a:latin typeface="Arial"/>
+                <a:ea typeface="Arial"/>
+                <a:cs typeface="Arial"/>
+              </a:defRPr>
+            </a:defPPr>
+          </a:lstStyle>
           <a:p xmlns:a="http://schemas.openxmlformats.org/drawingml/2006/main">
             <a:pPr>
               <a:defRPr sz="2175" b="0">
@@ -2902,7 +4778,7 @@
     </p:spTree>
     <p:extLst>
       <p:ext uri="{BB962C8B-B14F-4D97-AF65-F5344CB8AC3E}">
-        <p14:creationId xmlns:p14="http://schemas.microsoft.com/office/powerpoint/2010/main" val="2059500191"/>
+        <p14:creationId xmlns:p14="http://schemas.microsoft.com/office/powerpoint/2010/main" val="1561335150"/>
       </p:ext>
     </p:extLst>
   </p:cSld>
@@ -2950,16 +4826,16 @@
         <a:srgbClr val="96607D"/>
       </a:folHlink>
     </a:clrScheme>
-    <a:fontScheme name="Office">
+    <a:fontScheme name="">
       <a:majorFont>
-        <a:latin typeface="Calibri Light"/>
-        <a:ea typeface="Calibri Light"/>
-        <a:cs typeface="Calibri Light"/>
+        <a:latin typeface="Aptos"/>
+        <a:ea typeface=""/>
+        <a:cs typeface=""/>
       </a:majorFont>
       <a:minorFont>
-        <a:latin typeface="Calibri"/>
-        <a:ea typeface="Calibri"/>
-        <a:cs typeface="Calibri"/>
+        <a:latin typeface="Aptos"/>
+        <a:ea typeface=""/>
+        <a:cs typeface=""/>
       </a:minorFont>
     </a:fontScheme>
     <a:fmtScheme name="ChatGPT">
